--- a/lecons/F5/26_F5_M2_L23_Land_Reclamation.pptx
+++ b/lecons/F5/26_F5_M2_L23_Land_Reclamation.pptx
@@ -56,9 +56,10 @@
     <p:sldId id="304" r:id="rId50"/>
     <p:sldId id="305" r:id="rId51"/>
     <p:sldId id="306" r:id="rId52"/>
+    <p:sldId id="307" r:id="rId53"/>
   </p:sldIdLst>
   <p:notesMasterIdLst>
-    <p:notesMasterId r:id="rId53"/>
+    <p:notesMasterId r:id="rId54"/>
   </p:notesMasterIdLst>
   <p:sldSz cx="12192000" cy="6858000"/>
   <p:notesSz cx="6858000" cy="12192000"/>
@@ -3280,7 +3281,7 @@
           <a:p>
             <a:r>
               <a:rPr lang="en-US" dirty="0"/>
-              <a:t>Let us copy Advantages, Disadvantages and Challenges. Land reclamation has the following effects and challenges. On this slide we have Advantages and Disadvantages. Write each point on a new line, with the key term first, and explain it in your own words when we revise. When you finish, we go to the next slide.</a:t>
+              <a:t>Let us copy Advantages. Land reclamation has the following advantages. On this slide we have More farmland and Land for settlement and industry. Write each point on a new line, with the key term first, and explain it in your own words when we revise.</a:t>
             </a:r>
             <a:endParaRPr lang="en-US" dirty="0"/>
           </a:p>
@@ -3368,7 +3369,7 @@
           <a:p>
             <a:r>
               <a:rPr lang="en-US" dirty="0"/>
-              <a:t>We continue with Advantages, Disadvantages and Challenges. On this slide we have Challenges. Write each point on a new line, with the key term first, and explain it in your own words when we revise.</a:t>
+              <a:t>Let us copy Disadvantages and Challenges. Land reclamation has the following disadvantages and challenges. On this slide we have Loss of wetlands and Salinisation. Write each point on a new line, with the key term first, and explain it in your own words when we revise. When you finish, we go to the next slide.</a:t>
             </a:r>
             <a:endParaRPr lang="en-US" dirty="0"/>
           </a:p>
@@ -3544,7 +3545,7 @@
           <a:p>
             <a:r>
               <a:rPr lang="en-US" dirty="0"/>
-              <a:t>Now let us check what you have understood. Question 1: What is a polder? Answer in your exercise book.</a:t>
+              <a:t>We continue with Disadvantages and Challenges. On this slide we have High costs. Write each point on a new line, with the key term first, and explain it in your own words when we revise.</a:t>
             </a:r>
             <a:endParaRPr lang="en-US" dirty="0"/>
           </a:p>
@@ -3632,7 +3633,7 @@
           <a:p>
             <a:r>
               <a:rPr lang="en-US" dirty="0"/>
-              <a:t>The expected answer is: land taken from the sea by dykes and pumping. If you got it right, well done.</a:t>
+              <a:t>Now let us check what you have understood. Question 1: What is a polder? Answer in your exercise book.</a:t>
             </a:r>
             <a:endParaRPr lang="en-US" dirty="0"/>
           </a:p>
@@ -3720,7 +3721,7 @@
           <a:p>
             <a:r>
               <a:rPr lang="en-US" dirty="0"/>
-              <a:t>Now let us check what you have understood. Question 2: Give one advantage and one challenge of land reclamation. Answer in your exercise book.</a:t>
+              <a:t>The expected answer is: land taken from the sea by dykes and pumping. If you got it right, well done.</a:t>
             </a:r>
             <a:endParaRPr lang="en-US" dirty="0"/>
           </a:p>
@@ -3808,7 +3809,7 @@
           <a:p>
             <a:r>
               <a:rPr lang="en-US" dirty="0"/>
-              <a:t>The expected answer is: more farmland; high costs. If you got it right, well done.</a:t>
+              <a:t>Now let us check what you have understood. Question 2: Give one advantage and one challenge of land reclamation. Answer in your exercise book.</a:t>
             </a:r>
             <a:endParaRPr lang="en-US" dirty="0"/>
           </a:p>
@@ -3896,7 +3897,7 @@
           <a:p>
             <a:r>
               <a:rPr lang="en-US" dirty="0"/>
-              <a:t>For those who need more practice, fill in the blanks in your exercise book. The answers are: number 1, polder; number 2, dykes; number 3, irrigation.</a:t>
+              <a:t>The expected answer is: more farmland; high costs. If you got it right, well done.</a:t>
             </a:r>
             <a:endParaRPr lang="en-US" dirty="0"/>
           </a:p>
@@ -3984,7 +3985,7 @@
           <a:p>
             <a:r>
               <a:rPr lang="en-US" dirty="0"/>
-              <a:t>For your homework: Propose three ways to reclaim degraded land in the North of Cameroon. We shall correct it at the beginning of our next lesson.</a:t>
+              <a:t>For those who need more practice, fill in the blanks in your exercise book. The answers are: number 1, polder; number 2, dykes; number 3, irrigation.</a:t>
             </a:r>
             <a:endParaRPr lang="en-US" dirty="0"/>
           </a:p>
@@ -4072,7 +4073,7 @@
           <a:p>
             <a:r>
               <a:rPr lang="en-US" dirty="0"/>
-              <a:t>Our next lesson will be on Lesson 24: Multipurpose River Development Project (MRDP). Thank you for your attention, and see you next time.</a:t>
+              <a:t>For your homework: Propose three ways to reclaim degraded land in the North of Cameroon. We shall correct it at the beginning of our next lesson.</a:t>
             </a:r>
             <a:endParaRPr lang="en-US" dirty="0"/>
           </a:p>
@@ -4160,7 +4161,7 @@
           <a:p>
             <a:r>
               <a:rPr lang="en-US" dirty="0"/>
-              <a:t>Let us play the bilingual game. I say a word in English, and you give me the French word. Then we do the reverse.</a:t>
+              <a:t>Our next lesson will be on Lesson 24: Multipurpose River Development Project (MRDP). Thank you for your attention, and see you next time.</a:t>
             </a:r>
             <a:endParaRPr lang="en-US" dirty="0"/>
           </a:p>
@@ -4248,7 +4249,7 @@
           <a:p>
             <a:r>
               <a:rPr lang="en-US" dirty="0"/>
-              <a:t>I record this information in the official logbook of the class after the lesson.</a:t>
+              <a:t>Let us play the bilingual game. I say a word in English, and you give me the French word. Then we do the reverse.</a:t>
             </a:r>
             <a:endParaRPr lang="en-US" dirty="0"/>
           </a:p>
@@ -4336,7 +4337,7 @@
           <a:p>
             <a:r>
               <a:rPr lang="en-US" dirty="0"/>
-              <a:t>I complete the second page of the logbook: the matter taught, the evaluation, the homework and the attendance.</a:t>
+              <a:t>I record this information in the official logbook of the class after the lesson.</a:t>
             </a:r>
             <a:endParaRPr lang="en-US" dirty="0"/>
           </a:p>
@@ -4512,7 +4513,7 @@
           <a:p>
             <a:r>
               <a:rPr lang="en-US" dirty="0"/>
-              <a:t>This slide is for me, the teacher: it gives the timing of the lesson and what to do if the projector is not available.</a:t>
+              <a:t>I complete the second page of the logbook: the matter taught, the evaluation, the homework and the attendance.</a:t>
             </a:r>
             <a:endParaRPr lang="en-US" dirty="0"/>
           </a:p>
@@ -4600,7 +4601,7 @@
           <a:p>
             <a:r>
               <a:rPr lang="en-US" dirty="0"/>
-              <a:t>These are the references and picture credits used to prepare this lesson.</a:t>
+              <a:t>This slide is for me, the teacher: it gives the timing of the lesson and what to do if the projector is not available.</a:t>
             </a:r>
             <a:endParaRPr lang="en-US" dirty="0"/>
           </a:p>
@@ -4624,6 +4625,94 @@
             <a:fld id="{F7021451-1387-4CA6-816F-3879F97B5CBC}" type="slidenum">
               <a:rPr lang="en-US"/>
               <a:t>51</a:t>
+            </a:fld>
+            <a:endParaRPr lang="en-US"/>
+          </a:p>
+        </p:txBody>
+      </p:sp>
+    </p:spTree>
+    <p:extLst>
+      <p:ext uri="{BB962C8B-B14F-4D97-AF65-F5344CB8AC3E}">
+        <p14:creationId xmlns:p14="http://schemas.microsoft.com/office/powerpoint/2010/main" val="1024086991"/>
+      </p:ext>
+    </p:extLst>
+  </p:cSld>
+  <p:clrMapOvr>
+    <a:masterClrMapping/>
+  </p:clrMapOvr>
+</p:notes>
+</file>
+
+<file path=ppt/notesSlides/notesSlide52.xml><?xml version="1.0" encoding="utf-8"?>
+<p:notes xmlns:a="http://schemas.openxmlformats.org/drawingml/2006/main" xmlns:r="http://schemas.openxmlformats.org/officeDocument/2006/relationships" xmlns:p="http://schemas.openxmlformats.org/presentationml/2006/main">
+  <p:cSld>
+    <p:spTree>
+      <p:nvGrpSpPr>
+        <p:cNvPr id="1" name=""/>
+        <p:cNvGrpSpPr/>
+        <p:nvPr/>
+      </p:nvGrpSpPr>
+      <p:grpSpPr>
+        <a:xfrm>
+          <a:off x="0" y="0"/>
+          <a:ext cx="0" cy="0"/>
+          <a:chOff x="0" y="0"/>
+          <a:chExt cx="0" cy="0"/>
+        </a:xfrm>
+      </p:grpSpPr>
+      <p:sp>
+        <p:nvSpPr>
+          <p:cNvPr id="2" name="Slide Image Placeholder 1"/>
+          <p:cNvSpPr>
+            <a:spLocks noGrp="1" noRot="1" noChangeAspect="1"/>
+          </p:cNvSpPr>
+          <p:nvPr>
+            <p:ph type="sldImg"/>
+          </p:nvPr>
+        </p:nvSpPr>
+        <p:spPr/>
+      </p:sp>
+      <p:sp>
+        <p:nvSpPr>
+          <p:cNvPr id="3" name="Notes Placeholder 2"/>
+          <p:cNvSpPr>
+            <a:spLocks noGrp="1"/>
+          </p:cNvSpPr>
+          <p:nvPr>
+            <p:ph type="body" idx="1"/>
+          </p:nvPr>
+        </p:nvSpPr>
+        <p:spPr/>
+        <p:txBody>
+          <a:bodyPr/>
+          <a:lstStyle/>
+          <a:p>
+            <a:r>
+              <a:rPr lang="en-US" dirty="0"/>
+              <a:t>These are the references and picture credits used to prepare this lesson.</a:t>
+            </a:r>
+            <a:endParaRPr lang="en-US" dirty="0"/>
+          </a:p>
+        </p:txBody>
+      </p:sp>
+      <p:sp>
+        <p:nvSpPr>
+          <p:cNvPr id="4" name="Slide Number Placeholder 3"/>
+          <p:cNvSpPr>
+            <a:spLocks noGrp="1"/>
+          </p:cNvSpPr>
+          <p:nvPr>
+            <p:ph type="sldNum" sz="quarter" idx="10"/>
+          </p:nvPr>
+        </p:nvSpPr>
+        <p:spPr/>
+        <p:txBody>
+          <a:bodyPr/>
+          <a:lstStyle/>
+          <a:p>
+            <a:fld id="{F7021451-1387-4CA6-816F-3879F97B5CBC}" type="slidenum">
+              <a:rPr lang="en-US"/>
+              <a:t>52</a:t>
             </a:fld>
             <a:endParaRPr lang="en-US"/>
           </a:p>
@@ -14299,8 +14388,47 @@
         </p:nvSpPr>
         <p:spPr>
           <a:xfrm>
-            <a:off x="4069080" y="1783080"/>
-            <a:ext cx="7802575" cy="4663440"/>
+            <a:off x="4069080" y="1737360"/>
+            <a:ext cx="7802575" cy="457200"/>
+          </a:xfrm>
+          <a:prstGeom prst="rect">
+            <a:avLst/>
+          </a:prstGeom>
+          <a:noFill/>
+          <a:ln/>
+        </p:spPr>
+        <p:txBody>
+          <a:bodyPr wrap="square" lIns="0" tIns="0" rIns="0" bIns="0" rtlCol="0" anchor="ctr"/>
+          <a:lstStyle/>
+          <a:p>
+            <a:pPr algn="l" indent="0" marL="0">
+              <a:buNone/>
+            </a:pPr>
+            <a:r>
+              <a:rPr lang="en-US" sz="3200" b="1" dirty="0">
+                <a:solidFill>
+                  <a:srgbClr val="990011"/>
+                </a:solidFill>
+                <a:latin typeface="Times New Roman" pitchFamily="34" charset="0"/>
+                <a:ea typeface="Times New Roman" pitchFamily="34" charset="-122"/>
+                <a:cs typeface="Times New Roman" pitchFamily="34" charset="-120"/>
+              </a:rPr>
+              <a:t>A) Advantages</a:t>
+            </a:r>
+            <a:endParaRPr lang="en-US" sz="3200" dirty="0"/>
+          </a:p>
+        </p:txBody>
+      </p:sp>
+      <p:sp>
+        <p:nvSpPr>
+          <p:cNvPr id="6" name="Text 3"/>
+          <p:cNvSpPr/>
+          <p:nvPr/>
+        </p:nvSpPr>
+        <p:spPr>
+          <a:xfrm>
+            <a:off x="4069080" y="2240280"/>
+            <a:ext cx="7802575" cy="4206240"/>
           </a:xfrm>
           <a:prstGeom prst="rect">
             <a:avLst/>
@@ -14327,7 +14455,7 @@
                 <a:ea typeface="Times New Roman" pitchFamily="34" charset="-122"/>
                 <a:cs typeface="Times New Roman" pitchFamily="34" charset="-120"/>
               </a:rPr>
-              <a:t>Land reclamation has the following effects and challenges:</a:t>
+              <a:t>Land reclamation has the following advantages:</a:t>
             </a:r>
             <a:endParaRPr lang="en-US" sz="4000" dirty="0"/>
           </a:p>
@@ -14347,7 +14475,7 @@
                 <a:ea typeface="Times New Roman" pitchFamily="34" charset="-122"/>
                 <a:cs typeface="Times New Roman" pitchFamily="34" charset="-120"/>
               </a:rPr>
-              <a:t>Advantages: </a:t>
+              <a:t>More farmland: </a:t>
             </a:r>
             <a:pPr algn="l" indent="0" marL="0">
               <a:spcAft>
@@ -14364,7 +14492,7 @@
                 <a:ea typeface="Times New Roman" pitchFamily="34" charset="-122"/>
                 <a:cs typeface="Times New Roman" pitchFamily="34" charset="-120"/>
               </a:rPr>
-              <a:t>It gives more land for farming, settlement and industry.</a:t>
+              <a:t>New land can be cultivated.</a:t>
             </a:r>
             <a:endParaRPr lang="en-US" sz="4000" dirty="0"/>
           </a:p>
@@ -14384,7 +14512,7 @@
                 <a:ea typeface="Times New Roman" pitchFamily="34" charset="-122"/>
                 <a:cs typeface="Times New Roman" pitchFamily="34" charset="-120"/>
               </a:rPr>
-              <a:t>Disadvantages: </a:t>
+              <a:t>Land for settlement and industry: </a:t>
             </a:r>
             <a:pPr algn="l" indent="0" marL="0">
               <a:spcAft>
@@ -14401,7 +14529,7 @@
                 <a:ea typeface="Times New Roman" pitchFamily="34" charset="-122"/>
                 <a:cs typeface="Times New Roman" pitchFamily="34" charset="-120"/>
               </a:rPr>
-              <a:t>It destroys wetlands and habitats and can cause salinisation.</a:t>
+              <a:t>Towns and factories can expand.</a:t>
             </a:r>
             <a:endParaRPr lang="en-US" sz="4000" dirty="0"/>
           </a:p>
@@ -14536,7 +14664,7 @@
         <p:spPr>
           <a:xfrm>
             <a:off x="0" y="658368"/>
-            <a:ext cx="5120640" cy="5833872"/>
+            <a:ext cx="3840480" cy="5833872"/>
           </a:xfrm>
           <a:prstGeom prst="rect">
             <a:avLst/>
@@ -14551,8 +14679,8 @@
         </p:nvSpPr>
         <p:spPr>
           <a:xfrm>
-            <a:off x="5349240" y="1005840"/>
-            <a:ext cx="6522415" cy="731520"/>
+            <a:off x="4069080" y="1005840"/>
+            <a:ext cx="7802575" cy="731520"/>
           </a:xfrm>
           <a:prstGeom prst="rect">
             <a:avLst/>
@@ -14578,7 +14706,7 @@
                 <a:ea typeface="Times New Roman" pitchFamily="34" charset="-122"/>
                 <a:cs typeface="Times New Roman" pitchFamily="34" charset="-120"/>
               </a:rPr>
-              <a:t>2. Advantages, Disadvantages and Challenges (continued)</a:t>
+              <a:t>2. Advantages, Disadvantages and Challenges</a:t>
             </a:r>
             <a:endParaRPr lang="en-US" sz="3600" dirty="0"/>
           </a:p>
@@ -14592,8 +14720,47 @@
         </p:nvSpPr>
         <p:spPr>
           <a:xfrm>
-            <a:off x="5349240" y="1783080"/>
-            <a:ext cx="6522415" cy="4663440"/>
+            <a:off x="4069080" y="1737360"/>
+            <a:ext cx="7802575" cy="457200"/>
+          </a:xfrm>
+          <a:prstGeom prst="rect">
+            <a:avLst/>
+          </a:prstGeom>
+          <a:noFill/>
+          <a:ln/>
+        </p:spPr>
+        <p:txBody>
+          <a:bodyPr wrap="square" lIns="0" tIns="0" rIns="0" bIns="0" rtlCol="0" anchor="ctr"/>
+          <a:lstStyle/>
+          <a:p>
+            <a:pPr algn="l" indent="0" marL="0">
+              <a:buNone/>
+            </a:pPr>
+            <a:r>
+              <a:rPr lang="en-US" sz="3200" b="1" dirty="0">
+                <a:solidFill>
+                  <a:srgbClr val="990011"/>
+                </a:solidFill>
+                <a:latin typeface="Times New Roman" pitchFamily="34" charset="0"/>
+                <a:ea typeface="Times New Roman" pitchFamily="34" charset="-122"/>
+                <a:cs typeface="Times New Roman" pitchFamily="34" charset="-120"/>
+              </a:rPr>
+              <a:t>B) Disadvantages and Challenges</a:t>
+            </a:r>
+            <a:endParaRPr lang="en-US" sz="3200" dirty="0"/>
+          </a:p>
+        </p:txBody>
+      </p:sp>
+      <p:sp>
+        <p:nvSpPr>
+          <p:cNvPr id="6" name="Text 3"/>
+          <p:cNvSpPr/>
+          <p:nvPr/>
+        </p:nvSpPr>
+        <p:spPr>
+          <a:xfrm>
+            <a:off x="4069080" y="2240280"/>
+            <a:ext cx="7802575" cy="4206240"/>
           </a:xfrm>
           <a:prstGeom prst="rect">
             <a:avLst/>
@@ -14612,7 +14779,7 @@
               <a:buNone/>
             </a:pPr>
             <a:r>
-              <a:rPr lang="en-US" sz="4000" b="1" dirty="0">
+              <a:rPr lang="en-US" sz="4000" i="1" dirty="0">
                 <a:solidFill>
                   <a:srgbClr val="111111"/>
                 </a:solidFill>
@@ -14620,8 +14787,11 @@
                 <a:ea typeface="Times New Roman" pitchFamily="34" charset="-122"/>
                 <a:cs typeface="Times New Roman" pitchFamily="34" charset="-120"/>
               </a:rPr>
-              <a:t>Challenges: </a:t>
-            </a:r>
+              <a:t>Land reclamation has the following disadvantages and challenges:</a:t>
+            </a:r>
+            <a:endParaRPr lang="en-US" sz="4000" dirty="0"/>
+          </a:p>
+          <a:p>
             <a:pPr algn="l" indent="0" marL="0">
               <a:spcAft>
                 <a:spcPts val="800"/>
@@ -14629,7 +14799,7 @@
               <a:buNone/>
             </a:pPr>
             <a:r>
-              <a:rPr lang="en-US" sz="4000" dirty="0">
+              <a:rPr lang="en-US" sz="4000" b="1" dirty="0">
                 <a:solidFill>
                   <a:srgbClr val="111111"/>
                 </a:solidFill>
@@ -14637,7 +14807,61 @@
                 <a:ea typeface="Times New Roman" pitchFamily="34" charset="-122"/>
                 <a:cs typeface="Times New Roman" pitchFamily="34" charset="-120"/>
               </a:rPr>
-              <a:t>It needs much capital, technology and maintenance.</a:t>
+              <a:t>Loss of wetlands: </a:t>
+            </a:r>
+            <a:pPr algn="l" indent="0" marL="0">
+              <a:spcAft>
+                <a:spcPts val="800"/>
+              </a:spcAft>
+              <a:buNone/>
+            </a:pPr>
+            <a:r>
+              <a:rPr lang="en-US" sz="4000" dirty="0">
+                <a:solidFill>
+                  <a:srgbClr val="111111"/>
+                </a:solidFill>
+                <a:latin typeface="Times New Roman" pitchFamily="34" charset="0"/>
+                <a:ea typeface="Times New Roman" pitchFamily="34" charset="-122"/>
+                <a:cs typeface="Times New Roman" pitchFamily="34" charset="-120"/>
+              </a:rPr>
+              <a:t>Habitats of birds and fish are destroyed.</a:t>
+            </a:r>
+            <a:endParaRPr lang="en-US" sz="4000" dirty="0"/>
+          </a:p>
+          <a:p>
+            <a:pPr algn="l" indent="0" marL="0">
+              <a:spcAft>
+                <a:spcPts val="800"/>
+              </a:spcAft>
+              <a:buNone/>
+            </a:pPr>
+            <a:r>
+              <a:rPr lang="en-US" sz="4000" b="1" dirty="0">
+                <a:solidFill>
+                  <a:srgbClr val="111111"/>
+                </a:solidFill>
+                <a:latin typeface="Times New Roman" pitchFamily="34" charset="0"/>
+                <a:ea typeface="Times New Roman" pitchFamily="34" charset="-122"/>
+                <a:cs typeface="Times New Roman" pitchFamily="34" charset="-120"/>
+              </a:rPr>
+              <a:t>Salinisation: </a:t>
+            </a:r>
+            <a:pPr algn="l" indent="0" marL="0">
+              <a:spcAft>
+                <a:spcPts val="800"/>
+              </a:spcAft>
+              <a:buNone/>
+            </a:pPr>
+            <a:r>
+              <a:rPr lang="en-US" sz="4000" dirty="0">
+                <a:solidFill>
+                  <a:srgbClr val="111111"/>
+                </a:solidFill>
+                <a:latin typeface="Times New Roman" pitchFamily="34" charset="0"/>
+                <a:ea typeface="Times New Roman" pitchFamily="34" charset="-122"/>
+                <a:cs typeface="Times New Roman" pitchFamily="34" charset="-120"/>
+              </a:rPr>
+              <a:t>Salt can make the soil infertile.</a:t>
             </a:r>
             <a:endParaRPr lang="en-US" sz="4000" dirty="0"/>
           </a:p>
@@ -14988,7 +15212,7 @@
                 <a:ea typeface="Calibri" pitchFamily="34" charset="-122"/>
                 <a:cs typeface="Calibri" pitchFamily="34" charset="-120"/>
               </a:rPr>
-              <a:t>FORMATIVE EVALUATION</a:t>
+              <a:t>BOARD SUMMARY</a:t>
             </a:r>
             <a:endParaRPr lang="en-US" sz="1400" dirty="0"/>
           </a:p>
@@ -15053,7 +15277,7 @@
                 <a:ea typeface="Times New Roman" pitchFamily="34" charset="-122"/>
                 <a:cs typeface="Times New Roman" pitchFamily="34" charset="-120"/>
               </a:rPr>
-              <a:t>Evaluation 1</a:t>
+              <a:t>2. Advantages, Disadvantages and Challenges</a:t>
             </a:r>
             <a:endParaRPr lang="en-US" sz="3600" dirty="0"/>
           </a:p>
@@ -15067,8 +15291,47 @@
         </p:nvSpPr>
         <p:spPr>
           <a:xfrm>
-            <a:off x="5349240" y="1783080"/>
-            <a:ext cx="6522415" cy="4663440"/>
+            <a:off x="5349240" y="1737360"/>
+            <a:ext cx="6522415" cy="457200"/>
+          </a:xfrm>
+          <a:prstGeom prst="rect">
+            <a:avLst/>
+          </a:prstGeom>
+          <a:noFill/>
+          <a:ln/>
+        </p:spPr>
+        <p:txBody>
+          <a:bodyPr wrap="square" lIns="0" tIns="0" rIns="0" bIns="0" rtlCol="0" anchor="ctr"/>
+          <a:lstStyle/>
+          <a:p>
+            <a:pPr algn="l" indent="0" marL="0">
+              <a:buNone/>
+            </a:pPr>
+            <a:r>
+              <a:rPr lang="en-US" sz="2300" b="1" dirty="0">
+                <a:solidFill>
+                  <a:srgbClr val="990011"/>
+                </a:solidFill>
+                <a:latin typeface="Times New Roman" pitchFamily="34" charset="0"/>
+                <a:ea typeface="Times New Roman" pitchFamily="34" charset="-122"/>
+                <a:cs typeface="Times New Roman" pitchFamily="34" charset="-120"/>
+              </a:rPr>
+              <a:t>B) Disadvantages and Challenges (continued)</a:t>
+            </a:r>
+            <a:endParaRPr lang="en-US" sz="2300" dirty="0"/>
+          </a:p>
+        </p:txBody>
+      </p:sp>
+      <p:sp>
+        <p:nvSpPr>
+          <p:cNvPr id="6" name="Text 3"/>
+          <p:cNvSpPr/>
+          <p:nvPr/>
+        </p:nvSpPr>
+        <p:spPr>
+          <a:xfrm>
+            <a:off x="5349240" y="2240280"/>
+            <a:ext cx="6522415" cy="4206240"/>
           </a:xfrm>
           <a:prstGeom prst="rect">
             <a:avLst/>
@@ -15087,7 +15350,7 @@
               <a:buNone/>
             </a:pPr>
             <a:r>
-              <a:rPr lang="en-US" sz="4000" dirty="0">
+              <a:rPr lang="en-US" sz="4000" b="1" dirty="0">
                 <a:solidFill>
                   <a:srgbClr val="111111"/>
                 </a:solidFill>
@@ -15095,7 +15358,24 @@
                 <a:ea typeface="Times New Roman" pitchFamily="34" charset="-122"/>
                 <a:cs typeface="Times New Roman" pitchFamily="34" charset="-120"/>
               </a:rPr>
-              <a:t>What is a polder?</a:t>
+              <a:t>High costs: </a:t>
+            </a:r>
+            <a:pPr algn="l" indent="0" marL="0">
+              <a:spcAft>
+                <a:spcPts val="800"/>
+              </a:spcAft>
+              <a:buNone/>
+            </a:pPr>
+            <a:r>
+              <a:rPr lang="en-US" sz="4000" dirty="0">
+                <a:solidFill>
+                  <a:srgbClr val="111111"/>
+                </a:solidFill>
+                <a:latin typeface="Times New Roman" pitchFamily="34" charset="0"/>
+                <a:ea typeface="Times New Roman" pitchFamily="34" charset="-122"/>
+                <a:cs typeface="Times New Roman" pitchFamily="34" charset="-120"/>
+              </a:rPr>
+              <a:t>It needs much capital, technology and maintenance.</a:t>
             </a:r>
             <a:endParaRPr lang="en-US" sz="4000" dirty="0"/>
           </a:p>
@@ -15272,7 +15552,7 @@
                 <a:ea typeface="Times New Roman" pitchFamily="34" charset="-122"/>
                 <a:cs typeface="Times New Roman" pitchFamily="34" charset="-120"/>
               </a:rPr>
-              <a:t>Expected Answer</a:t>
+              <a:t>Evaluation 1</a:t>
             </a:r>
             <a:endParaRPr lang="en-US" sz="3600" dirty="0"/>
           </a:p>
@@ -15314,7 +15594,7 @@
                 <a:ea typeface="Times New Roman" pitchFamily="34" charset="-122"/>
                 <a:cs typeface="Times New Roman" pitchFamily="34" charset="-120"/>
               </a:rPr>
-              <a:t>Land taken from the sea by dykes and pumping.</a:t>
+              <a:t>What is a polder?</a:t>
             </a:r>
             <a:endParaRPr lang="en-US" sz="4000" dirty="0"/>
           </a:p>
@@ -15491,7 +15771,7 @@
                 <a:ea typeface="Times New Roman" pitchFamily="34" charset="-122"/>
                 <a:cs typeface="Times New Roman" pitchFamily="34" charset="-120"/>
               </a:rPr>
-              <a:t>Evaluation 2</a:t>
+              <a:t>Expected Answer</a:t>
             </a:r>
             <a:endParaRPr lang="en-US" sz="3600" dirty="0"/>
           </a:p>
@@ -15533,7 +15813,7 @@
                 <a:ea typeface="Times New Roman" pitchFamily="34" charset="-122"/>
                 <a:cs typeface="Times New Roman" pitchFamily="34" charset="-120"/>
               </a:rPr>
-              <a:t>Give one advantage and one challenge of land reclamation.</a:t>
+              <a:t>Land taken from the sea by dykes and pumping.</a:t>
             </a:r>
             <a:endParaRPr lang="en-US" sz="4000" dirty="0"/>
           </a:p>
@@ -15710,7 +15990,7 @@
                 <a:ea typeface="Times New Roman" pitchFamily="34" charset="-122"/>
                 <a:cs typeface="Times New Roman" pitchFamily="34" charset="-120"/>
               </a:rPr>
-              <a:t>Expected Answer</a:t>
+              <a:t>Evaluation 2</a:t>
             </a:r>
             <a:endParaRPr lang="en-US" sz="3600" dirty="0"/>
           </a:p>
@@ -15752,7 +16032,7 @@
                 <a:ea typeface="Times New Roman" pitchFamily="34" charset="-122"/>
                 <a:cs typeface="Times New Roman" pitchFamily="34" charset="-120"/>
               </a:rPr>
-              <a:t>More farmland; high costs.</a:t>
+              <a:t>Give one advantage and one challenge of land reclamation.</a:t>
             </a:r>
             <a:endParaRPr lang="en-US" sz="4000" dirty="0"/>
           </a:p>
@@ -15864,7 +16144,7 @@
                 <a:ea typeface="Calibri" pitchFamily="34" charset="-122"/>
                 <a:cs typeface="Calibri" pitchFamily="34" charset="-120"/>
               </a:rPr>
-              <a:t>REMEDIATION</a:t>
+              <a:t>FORMATIVE EVALUATION</a:t>
             </a:r>
             <a:endParaRPr lang="en-US" sz="1400" dirty="0"/>
           </a:p>
@@ -15887,7 +16167,7 @@
         <p:spPr>
           <a:xfrm>
             <a:off x="0" y="658368"/>
-            <a:ext cx="3840480" cy="5833872"/>
+            <a:ext cx="5120640" cy="5833872"/>
           </a:xfrm>
           <a:prstGeom prst="rect">
             <a:avLst/>
@@ -15902,8 +16182,8 @@
         </p:nvSpPr>
         <p:spPr>
           <a:xfrm>
-            <a:off x="4069080" y="1005840"/>
-            <a:ext cx="7802575" cy="731520"/>
+            <a:off x="5349240" y="1005840"/>
+            <a:ext cx="6522415" cy="731520"/>
           </a:xfrm>
           <a:prstGeom prst="rect">
             <a:avLst/>
@@ -15929,7 +16209,7 @@
                 <a:ea typeface="Times New Roman" pitchFamily="34" charset="-122"/>
                 <a:cs typeface="Times New Roman" pitchFamily="34" charset="-120"/>
               </a:rPr>
-              <a:t>Remediation</a:t>
+              <a:t>Expected Answer</a:t>
             </a:r>
             <a:endParaRPr lang="en-US" sz="3600" dirty="0"/>
           </a:p>
@@ -15943,8 +16223,8 @@
         </p:nvSpPr>
         <p:spPr>
           <a:xfrm>
-            <a:off x="4069080" y="1783080"/>
-            <a:ext cx="7802575" cy="4663440"/>
+            <a:off x="5349240" y="1783080"/>
+            <a:ext cx="6522415" cy="4663440"/>
           </a:xfrm>
           <a:prstGeom prst="rect">
             <a:avLst/>
@@ -15963,7 +16243,7 @@
               <a:buNone/>
             </a:pPr>
             <a:r>
-              <a:rPr lang="en-US" sz="4000" b="1" dirty="0">
+              <a:rPr lang="en-US" sz="4000" dirty="0">
                 <a:solidFill>
                   <a:srgbClr val="111111"/>
                 </a:solidFill>
@@ -15971,73 +16251,7 @@
                 <a:ea typeface="Times New Roman" pitchFamily="34" charset="-122"/>
                 <a:cs typeface="Times New Roman" pitchFamily="34" charset="-120"/>
               </a:rPr>
-              <a:t>Fill in the blanks:</a:t>
-            </a:r>
-            <a:endParaRPr lang="en-US" sz="4000" dirty="0"/>
-          </a:p>
-          <a:p>
-            <a:pPr algn="l" marL="342900" indent="-342900">
-              <a:spcAft>
-                <a:spcPts val="800"/>
-              </a:spcAft>
-              <a:buSzPct val="100000"/>
-              <a:buFont typeface="+mj-lt"/>
-              <a:buAutoNum type="arabicPeriod" startAt="1"/>
-            </a:pPr>
-            <a:r>
-              <a:rPr lang="en-US" sz="4000" dirty="0">
-                <a:solidFill>
-                  <a:srgbClr val="111111"/>
-                </a:solidFill>
-                <a:latin typeface="Times New Roman" pitchFamily="34" charset="0"/>
-                <a:ea typeface="Times New Roman" pitchFamily="34" charset="-122"/>
-                <a:cs typeface="Times New Roman" pitchFamily="34" charset="-120"/>
-              </a:rPr>
-              <a:t>Land taken from the sea is a ______.</a:t>
-            </a:r>
-            <a:endParaRPr lang="en-US" sz="4000" dirty="0"/>
-          </a:p>
-          <a:p>
-            <a:pPr algn="l" marL="342900" indent="-342900">
-              <a:spcAft>
-                <a:spcPts val="800"/>
-              </a:spcAft>
-              <a:buSzPct val="100000"/>
-              <a:buFont typeface="+mj-lt"/>
-              <a:buAutoNum type="arabicPeriod" startAt="1"/>
-            </a:pPr>
-            <a:r>
-              <a:rPr lang="en-US" sz="4000" dirty="0">
-                <a:solidFill>
-                  <a:srgbClr val="111111"/>
-                </a:solidFill>
-                <a:latin typeface="Times New Roman" pitchFamily="34" charset="0"/>
-                <a:ea typeface="Times New Roman" pitchFamily="34" charset="-122"/>
-                <a:cs typeface="Times New Roman" pitchFamily="34" charset="-120"/>
-              </a:rPr>
-              <a:t>Walls built to hold back water are ______.</a:t>
-            </a:r>
-            <a:endParaRPr lang="en-US" sz="4000" dirty="0"/>
-          </a:p>
-          <a:p>
-            <a:pPr algn="l" marL="342900" indent="-342900">
-              <a:spcAft>
-                <a:spcPts val="800"/>
-              </a:spcAft>
-              <a:buSzPct val="100000"/>
-              <a:buFont typeface="+mj-lt"/>
-              <a:buAutoNum type="arabicPeriod" startAt="1"/>
-            </a:pPr>
-            <a:r>
-              <a:rPr lang="en-US" sz="4000" dirty="0">
-                <a:solidFill>
-                  <a:srgbClr val="111111"/>
-                </a:solidFill>
-                <a:latin typeface="Times New Roman" pitchFamily="34" charset="0"/>
-                <a:ea typeface="Times New Roman" pitchFamily="34" charset="-122"/>
-                <a:cs typeface="Times New Roman" pitchFamily="34" charset="-120"/>
-              </a:rPr>
-              <a:t>Watering dry land is ______.</a:t>
+              <a:t>More farmland; high costs.</a:t>
             </a:r>
             <a:endParaRPr lang="en-US" sz="4000" dirty="0"/>
           </a:p>
@@ -16149,7 +16363,7 @@
                 <a:ea typeface="Calibri" pitchFamily="34" charset="-122"/>
                 <a:cs typeface="Calibri" pitchFamily="34" charset="-120"/>
               </a:rPr>
-              <a:t>HOMEWORK</a:t>
+              <a:t>REMEDIATION</a:t>
             </a:r>
             <a:endParaRPr lang="en-US" sz="1400" dirty="0"/>
           </a:p>
@@ -16172,7 +16386,7 @@
         <p:spPr>
           <a:xfrm>
             <a:off x="0" y="658368"/>
-            <a:ext cx="5120640" cy="5833872"/>
+            <a:ext cx="3840480" cy="5833872"/>
           </a:xfrm>
           <a:prstGeom prst="rect">
             <a:avLst/>
@@ -16187,8 +16401,8 @@
         </p:nvSpPr>
         <p:spPr>
           <a:xfrm>
-            <a:off x="5349240" y="1005840"/>
-            <a:ext cx="6522415" cy="731520"/>
+            <a:off x="4069080" y="1005840"/>
+            <a:ext cx="7802575" cy="731520"/>
           </a:xfrm>
           <a:prstGeom prst="rect">
             <a:avLst/>
@@ -16214,7 +16428,7 @@
                 <a:ea typeface="Times New Roman" pitchFamily="34" charset="-122"/>
                 <a:cs typeface="Times New Roman" pitchFamily="34" charset="-120"/>
               </a:rPr>
-              <a:t>Homework</a:t>
+              <a:t>Remediation</a:t>
             </a:r>
             <a:endParaRPr lang="en-US" sz="3600" dirty="0"/>
           </a:p>
@@ -16228,8 +16442,8 @@
         </p:nvSpPr>
         <p:spPr>
           <a:xfrm>
-            <a:off x="5349240" y="1783080"/>
-            <a:ext cx="6522415" cy="4663440"/>
+            <a:off x="4069080" y="1783080"/>
+            <a:ext cx="7802575" cy="4663440"/>
           </a:xfrm>
           <a:prstGeom prst="rect">
             <a:avLst/>
@@ -16248,7 +16462,7 @@
               <a:buNone/>
             </a:pPr>
             <a:r>
-              <a:rPr lang="en-US" sz="4000" dirty="0">
+              <a:rPr lang="en-US" sz="4000" b="1" dirty="0">
                 <a:solidFill>
                   <a:srgbClr val="111111"/>
                 </a:solidFill>
@@ -16256,7 +16470,73 @@
                 <a:ea typeface="Times New Roman" pitchFamily="34" charset="-122"/>
                 <a:cs typeface="Times New Roman" pitchFamily="34" charset="-120"/>
               </a:rPr>
-              <a:t>Propose three ways to reclaim degraded land in the North of Cameroon.</a:t>
+              <a:t>Fill in the blanks:</a:t>
+            </a:r>
+            <a:endParaRPr lang="en-US" sz="4000" dirty="0"/>
+          </a:p>
+          <a:p>
+            <a:pPr algn="l" marL="342900" indent="-342900">
+              <a:spcAft>
+                <a:spcPts val="800"/>
+              </a:spcAft>
+              <a:buSzPct val="100000"/>
+              <a:buFont typeface="+mj-lt"/>
+              <a:buAutoNum type="arabicPeriod" startAt="1"/>
+            </a:pPr>
+            <a:r>
+              <a:rPr lang="en-US" sz="4000" dirty="0">
+                <a:solidFill>
+                  <a:srgbClr val="111111"/>
+                </a:solidFill>
+                <a:latin typeface="Times New Roman" pitchFamily="34" charset="0"/>
+                <a:ea typeface="Times New Roman" pitchFamily="34" charset="-122"/>
+                <a:cs typeface="Times New Roman" pitchFamily="34" charset="-120"/>
+              </a:rPr>
+              <a:t>Land taken from the sea is a ______.</a:t>
+            </a:r>
+            <a:endParaRPr lang="en-US" sz="4000" dirty="0"/>
+          </a:p>
+          <a:p>
+            <a:pPr algn="l" marL="342900" indent="-342900">
+              <a:spcAft>
+                <a:spcPts val="800"/>
+              </a:spcAft>
+              <a:buSzPct val="100000"/>
+              <a:buFont typeface="+mj-lt"/>
+              <a:buAutoNum type="arabicPeriod" startAt="1"/>
+            </a:pPr>
+            <a:r>
+              <a:rPr lang="en-US" sz="4000" dirty="0">
+                <a:solidFill>
+                  <a:srgbClr val="111111"/>
+                </a:solidFill>
+                <a:latin typeface="Times New Roman" pitchFamily="34" charset="0"/>
+                <a:ea typeface="Times New Roman" pitchFamily="34" charset="-122"/>
+                <a:cs typeface="Times New Roman" pitchFamily="34" charset="-120"/>
+              </a:rPr>
+              <a:t>Walls built to hold back water are ______.</a:t>
+            </a:r>
+            <a:endParaRPr lang="en-US" sz="4000" dirty="0"/>
+          </a:p>
+          <a:p>
+            <a:pPr algn="l" marL="342900" indent="-342900">
+              <a:spcAft>
+                <a:spcPts val="800"/>
+              </a:spcAft>
+              <a:buSzPct val="100000"/>
+              <a:buFont typeface="+mj-lt"/>
+              <a:buAutoNum type="arabicPeriod" startAt="1"/>
+            </a:pPr>
+            <a:r>
+              <a:rPr lang="en-US" sz="4000" dirty="0">
+                <a:solidFill>
+                  <a:srgbClr val="111111"/>
+                </a:solidFill>
+                <a:latin typeface="Times New Roman" pitchFamily="34" charset="0"/>
+                <a:ea typeface="Times New Roman" pitchFamily="34" charset="-122"/>
+                <a:cs typeface="Times New Roman" pitchFamily="34" charset="-120"/>
+              </a:rPr>
+              <a:t>Watering dry land is ______.</a:t>
             </a:r>
             <a:endParaRPr lang="en-US" sz="4000" dirty="0"/>
           </a:p>
@@ -16368,7 +16648,7 @@
                 <a:ea typeface="Calibri" pitchFamily="34" charset="-122"/>
                 <a:cs typeface="Calibri" pitchFamily="34" charset="-120"/>
               </a:rPr>
-              <a:t>NEXT LESSON</a:t>
+              <a:t>HOMEWORK</a:t>
             </a:r>
             <a:endParaRPr lang="en-US" sz="1400" dirty="0"/>
           </a:p>
@@ -16433,7 +16713,7 @@
                 <a:ea typeface="Times New Roman" pitchFamily="34" charset="-122"/>
                 <a:cs typeface="Times New Roman" pitchFamily="34" charset="-120"/>
               </a:rPr>
-              <a:t>Next Lesson</a:t>
+              <a:t>Homework</a:t>
             </a:r>
             <a:endParaRPr lang="en-US" sz="3600" dirty="0"/>
           </a:p>
@@ -16457,17 +16737,17 @@
           <a:ln/>
         </p:spPr>
         <p:txBody>
-          <a:bodyPr wrap="square" lIns="0" tIns="0" rIns="0" bIns="0" rtlCol="0" anchor="ctr"/>
-          <a:lstStyle/>
-          <a:p>
-            <a:pPr algn="ctr" indent="0" marL="0">
+          <a:bodyPr wrap="square" lIns="0" tIns="0" rIns="0" bIns="0" rtlCol="0" anchor="t"/>
+          <a:lstStyle/>
+          <a:p>
+            <a:pPr algn="l" indent="0" marL="0">
               <a:spcAft>
                 <a:spcPts val="800"/>
               </a:spcAft>
               <a:buNone/>
             </a:pPr>
             <a:r>
-              <a:rPr lang="en-US" sz="4000" b="1" dirty="0">
+              <a:rPr lang="en-US" sz="4000" dirty="0">
                 <a:solidFill>
                   <a:srgbClr val="111111"/>
                 </a:solidFill>
@@ -16475,27 +16755,7 @@
                 <a:ea typeface="Times New Roman" pitchFamily="34" charset="-122"/>
                 <a:cs typeface="Times New Roman" pitchFamily="34" charset="-120"/>
               </a:rPr>
-              <a:t>Our next lesson will be on:</a:t>
-            </a:r>
-            <a:endParaRPr lang="en-US" sz="4000" dirty="0"/>
-          </a:p>
-          <a:p>
-            <a:pPr algn="ctr" indent="0" marL="0">
-              <a:spcAft>
-                <a:spcPts val="800"/>
-              </a:spcAft>
-              <a:buNone/>
-            </a:pPr>
-            <a:r>
-              <a:rPr lang="en-US" sz="4000" b="1" dirty="0">
-                <a:solidFill>
-                  <a:srgbClr val="990011"/>
-                </a:solidFill>
-                <a:latin typeface="Times New Roman" pitchFamily="34" charset="0"/>
-                <a:ea typeface="Times New Roman" pitchFamily="34" charset="-122"/>
-                <a:cs typeface="Times New Roman" pitchFamily="34" charset="-120"/>
-              </a:rPr>
-              <a:t>Lesson 24: Multipurpose River Development Project (MRDP)</a:t>
+              <a:t>Propose three ways to reclaim degraded land in the North of Cameroon.</a:t>
             </a:r>
             <a:endParaRPr lang="en-US" sz="4000" dirty="0"/>
           </a:p>
@@ -16607,6 +16867,245 @@
                 <a:ea typeface="Calibri" pitchFamily="34" charset="-122"/>
                 <a:cs typeface="Calibri" pitchFamily="34" charset="-120"/>
               </a:rPr>
+              <a:t>NEXT LESSON</a:t>
+            </a:r>
+            <a:endParaRPr lang="en-US" sz="1400" dirty="0"/>
+          </a:p>
+        </p:txBody>
+      </p:sp>
+      <p:pic>
+        <p:nvPicPr>
+          <p:cNvPr id="3" name="Image 0" descr="/home/claude/f4/img/minesec_sheet.png">    </p:cNvPr>
+          <p:cNvPicPr>
+            <a:picLocks noChangeAspect="1"/>
+          </p:cNvPicPr>
+          <p:nvPr/>
+        </p:nvPicPr>
+        <p:blipFill>
+          <a:blip r:embed="rId1"/>
+          <a:stretch>
+            <a:fillRect/>
+          </a:stretch>
+        </p:blipFill>
+        <p:spPr>
+          <a:xfrm>
+            <a:off x="0" y="658368"/>
+            <a:ext cx="5120640" cy="5833872"/>
+          </a:xfrm>
+          <a:prstGeom prst="rect">
+            <a:avLst/>
+          </a:prstGeom>
+        </p:spPr>
+      </p:pic>
+      <p:sp>
+        <p:nvSpPr>
+          <p:cNvPr id="4" name="Text 1"/>
+          <p:cNvSpPr/>
+          <p:nvPr/>
+        </p:nvSpPr>
+        <p:spPr>
+          <a:xfrm>
+            <a:off x="5349240" y="1005840"/>
+            <a:ext cx="6522415" cy="731520"/>
+          </a:xfrm>
+          <a:prstGeom prst="rect">
+            <a:avLst/>
+          </a:prstGeom>
+          <a:noFill/>
+          <a:ln/>
+        </p:spPr>
+        <p:txBody>
+          <a:bodyPr wrap="square" lIns="0" tIns="0" rIns="0" bIns="0" rtlCol="0" anchor="ctr">
+            <a:normAutofit/>
+          </a:bodyPr>
+          <a:lstStyle/>
+          <a:p>
+            <a:pPr algn="ctr" indent="0" marL="0">
+              <a:buNone/>
+            </a:pPr>
+            <a:r>
+              <a:rPr lang="en-US" sz="3600" b="1" dirty="0">
+                <a:solidFill>
+                  <a:srgbClr val="990011"/>
+                </a:solidFill>
+                <a:latin typeface="Times New Roman" pitchFamily="34" charset="0"/>
+                <a:ea typeface="Times New Roman" pitchFamily="34" charset="-122"/>
+                <a:cs typeface="Times New Roman" pitchFamily="34" charset="-120"/>
+              </a:rPr>
+              <a:t>Next Lesson</a:t>
+            </a:r>
+            <a:endParaRPr lang="en-US" sz="3600" dirty="0"/>
+          </a:p>
+        </p:txBody>
+      </p:sp>
+      <p:sp>
+        <p:nvSpPr>
+          <p:cNvPr id="5" name="Text 2"/>
+          <p:cNvSpPr/>
+          <p:nvPr/>
+        </p:nvSpPr>
+        <p:spPr>
+          <a:xfrm>
+            <a:off x="5349240" y="1783080"/>
+            <a:ext cx="6522415" cy="4663440"/>
+          </a:xfrm>
+          <a:prstGeom prst="rect">
+            <a:avLst/>
+          </a:prstGeom>
+          <a:noFill/>
+          <a:ln/>
+        </p:spPr>
+        <p:txBody>
+          <a:bodyPr wrap="square" lIns="0" tIns="0" rIns="0" bIns="0" rtlCol="0" anchor="ctr"/>
+          <a:lstStyle/>
+          <a:p>
+            <a:pPr algn="ctr" indent="0" marL="0">
+              <a:spcAft>
+                <a:spcPts val="800"/>
+              </a:spcAft>
+              <a:buNone/>
+            </a:pPr>
+            <a:r>
+              <a:rPr lang="en-US" sz="4000" b="1" dirty="0">
+                <a:solidFill>
+                  <a:srgbClr val="111111"/>
+                </a:solidFill>
+                <a:latin typeface="Times New Roman" pitchFamily="34" charset="0"/>
+                <a:ea typeface="Times New Roman" pitchFamily="34" charset="-122"/>
+                <a:cs typeface="Times New Roman" pitchFamily="34" charset="-120"/>
+              </a:rPr>
+              <a:t>Our next lesson will be on:</a:t>
+            </a:r>
+            <a:endParaRPr lang="en-US" sz="4000" dirty="0"/>
+          </a:p>
+          <a:p>
+            <a:pPr algn="ctr" indent="0" marL="0">
+              <a:spcAft>
+                <a:spcPts val="800"/>
+              </a:spcAft>
+              <a:buNone/>
+            </a:pPr>
+            <a:r>
+              <a:rPr lang="en-US" sz="4000" b="1" dirty="0">
+                <a:solidFill>
+                  <a:srgbClr val="990011"/>
+                </a:solidFill>
+                <a:latin typeface="Times New Roman" pitchFamily="34" charset="0"/>
+                <a:ea typeface="Times New Roman" pitchFamily="34" charset="-122"/>
+                <a:cs typeface="Times New Roman" pitchFamily="34" charset="-120"/>
+              </a:rPr>
+              <a:t>Lesson 24: Multipurpose River Development Project (MRDP)</a:t>
+            </a:r>
+            <a:endParaRPr lang="en-US" sz="4000" dirty="0"/>
+          </a:p>
+        </p:txBody>
+      </p:sp>
+      <p:sp>
+        <p:nvSpPr>
+          <p:cNvPr id="25" name="Slide Number Placeholder 0"/>
+          <p:cNvSpPr>
+            <a:spLocks noGrp="1"/>
+          </p:cNvSpPr>
+          <p:nvPr>
+            <p:ph type="sldNum" sz="quarter" idx="4294967295"/>
+          </p:nvPr>
+        </p:nvSpPr>
+        <p:spPr>
+          <a:xfrm>
+            <a:off x="27432" y="91440"/>
+            <a:ext cx="585216" cy="475488"/>
+          </a:xfrm>
+          <a:prstGeom prst="rect">
+            <a:avLst/>
+          </a:prstGeom>
+          <a:extLst>
+            <a:ext uri="{C572A759-6A51-4108-AA02-DFA0A04FC94B}">
+              <ma14:wrappingTextBoxFlag xmlns:ma14="http://schemas.microsoft.com/office/mac/drawingml/2011/main" val="0"/>
+            </a:ext>
+          </a:extLst>
+        </p:spPr>
+        <p:txBody>
+          <a:bodyPr/>
+          <a:lstStyle>
+            <a:lvl1pPr>
+              <a:defRPr sz="2000">
+                <a:solidFill>
+                  <a:srgbClr val="FFFFFF"/>
+                </a:solidFill>
+                <a:latin typeface="Calibri"/>
+                <a:ea typeface="Calibri"/>
+                <a:cs typeface="Calibri"/>
+              </a:defRPr>
+            </a:lvl1pPr>
+          </a:lstStyle>
+          <a:p>
+            <a:pPr algn="ctr"/>
+            <a:fld id="{F7021451-1387-4CA6-816F-3879F97B5CBC}" type="slidenum">
+              <a:rPr b="1" lang="en-US"/>
+              <a:t>47</a:t>
+            </a:fld>
+            <a:endParaRPr lang="en-US"/>
+          </a:p>
+        </p:txBody>
+      </p:sp>
+    </p:spTree>
+  </p:cSld>
+  <p:clrMapOvr>
+    <a:masterClrMapping/>
+  </p:clrMapOvr>
+</p:sld>
+</file>
+
+<file path=ppt/slides/slide48.xml><?xml version="1.0" encoding="utf-8"?>
+<p:sld xmlns:a="http://schemas.openxmlformats.org/drawingml/2006/main" xmlns:r="http://schemas.openxmlformats.org/officeDocument/2006/relationships" xmlns:p="http://schemas.openxmlformats.org/presentationml/2006/main">
+  <p:cSld name="Slide 48">
+    <p:spTree>
+      <p:nvGrpSpPr>
+        <p:cNvPr id="1" name=""/>
+        <p:cNvGrpSpPr/>
+        <p:nvPr/>
+      </p:nvGrpSpPr>
+      <p:grpSpPr>
+        <a:xfrm>
+          <a:off x="0" y="0"/>
+          <a:ext cx="0" cy="0"/>
+          <a:chOff x="0" y="0"/>
+          <a:chExt cx="0" cy="0"/>
+        </a:xfrm>
+      </p:grpSpPr>
+      <p:sp>
+        <p:nvSpPr>
+          <p:cNvPr id="2" name="Text 0"/>
+          <p:cNvSpPr/>
+          <p:nvPr/>
+        </p:nvSpPr>
+        <p:spPr>
+          <a:xfrm>
+            <a:off x="457200" y="713232"/>
+            <a:ext cx="11368735" cy="274320"/>
+          </a:xfrm>
+          <a:prstGeom prst="rect">
+            <a:avLst/>
+          </a:prstGeom>
+          <a:noFill/>
+          <a:ln/>
+        </p:spPr>
+        <p:txBody>
+          <a:bodyPr wrap="square" lIns="0" tIns="0" rIns="0" bIns="0" rtlCol="0" anchor="ctr"/>
+          <a:lstStyle/>
+          <a:p>
+            <a:pPr algn="r" indent="0" marL="0">
+              <a:buNone/>
+            </a:pPr>
+            <a:r>
+              <a:rPr lang="en-US" sz="1400" b="1" dirty="0">
+                <a:solidFill>
+                  <a:srgbClr val="1C3F6E"/>
+                </a:solidFill>
+                <a:latin typeface="Calibri" pitchFamily="34" charset="0"/>
+                <a:ea typeface="Calibri" pitchFamily="34" charset="-122"/>
+                <a:cs typeface="Calibri" pitchFamily="34" charset="-120"/>
+              </a:rPr>
               <a:t>BILINGUAL GAME</a:t>
             </a:r>
             <a:endParaRPr lang="en-US" sz="1400" dirty="0"/>
@@ -16654,7 +17153,7 @@
       </p:sp>
       <p:graphicFrame>
         <p:nvGraphicFramePr>
-          <p:cNvPr id="48" name="Table 0"/>
+          <p:cNvPr id="49" name="Table 0"/>
           <p:cNvGraphicFramePr>
             <a:graphicFrameLocks noGrp="1"/>
           </p:cNvGraphicFramePr>
@@ -17690,7 +18189,7 @@
             <a:pPr algn="ctr"/>
             <a:fld id="{F7021451-1387-4CA6-816F-3879F97B5CBC}" type="slidenum">
               <a:rPr b="1" lang="en-US"/>
-              <a:t>47</a:t>
+              <a:t>48</a:t>
             </a:fld>
             <a:endParaRPr lang="en-US"/>
           </a:p>
@@ -17704,9 +18203,9 @@
 </p:sld>
 </file>
 
-<file path=ppt/slides/slide48.xml><?xml version="1.0" encoding="utf-8"?>
+<file path=ppt/slides/slide49.xml><?xml version="1.0" encoding="utf-8"?>
 <p:sld xmlns:a="http://schemas.openxmlformats.org/drawingml/2006/main" xmlns:r="http://schemas.openxmlformats.org/officeDocument/2006/relationships" xmlns:p="http://schemas.openxmlformats.org/presentationml/2006/main">
-  <p:cSld name="Slide 48">
+  <p:cSld name="Slide 49">
     <p:spTree>
       <p:nvGrpSpPr>
         <p:cNvPr id="1" name=""/>
@@ -17801,7 +18300,7 @@
       </p:sp>
       <p:graphicFrame>
         <p:nvGraphicFramePr>
-          <p:cNvPr id="49" name="Table 0"/>
+          <p:cNvPr id="50" name="Table 0"/>
           <p:cNvGraphicFramePr>
             <a:graphicFrameLocks noGrp="1"/>
           </p:cNvGraphicFramePr>
@@ -18423,7 +18922,7 @@
             <a:pPr algn="ctr"/>
             <a:fld id="{F7021451-1387-4CA6-816F-3879F97B5CBC}" type="slidenum">
               <a:rPr b="1" lang="en-US"/>
-              <a:t>48</a:t>
+              <a:t>49</a:t>
             </a:fld>
             <a:endParaRPr lang="en-US"/>
           </a:p>
@@ -18437,9 +18936,9 @@
 </p:sld>
 </file>
 
-<file path=ppt/slides/slide49.xml><?xml version="1.0" encoding="utf-8"?>
+<file path=ppt/slides/slide5.xml><?xml version="1.0" encoding="utf-8"?>
 <p:sld xmlns:a="http://schemas.openxmlformats.org/drawingml/2006/main" xmlns:r="http://schemas.openxmlformats.org/officeDocument/2006/relationships" xmlns:p="http://schemas.openxmlformats.org/presentationml/2006/main">
-  <p:cSld name="Slide 49">
+  <p:cSld name="Slide 5">
     <p:spTree>
       <p:nvGrpSpPr>
         <p:cNvPr id="1" name=""/>
@@ -18487,6 +18986,225 @@
                 <a:ea typeface="Calibri" pitchFamily="34" charset="-122"/>
                 <a:cs typeface="Calibri" pitchFamily="34" charset="-120"/>
               </a:rPr>
+              <a:t>HOMEWORK CORRECTION</a:t>
+            </a:r>
+            <a:endParaRPr lang="en-US" sz="1400" dirty="0"/>
+          </a:p>
+        </p:txBody>
+      </p:sp>
+      <p:pic>
+        <p:nvPicPr>
+          <p:cNvPr id="3" name="Image 0" descr="/home/claude/f4/img/minesec_sheet.png">    </p:cNvPr>
+          <p:cNvPicPr>
+            <a:picLocks noChangeAspect="1"/>
+          </p:cNvPicPr>
+          <p:nvPr/>
+        </p:nvPicPr>
+        <p:blipFill>
+          <a:blip r:embed="rId1"/>
+          <a:stretch>
+            <a:fillRect/>
+          </a:stretch>
+        </p:blipFill>
+        <p:spPr>
+          <a:xfrm>
+            <a:off x="0" y="658368"/>
+            <a:ext cx="5120640" cy="5833872"/>
+          </a:xfrm>
+          <a:prstGeom prst="rect">
+            <a:avLst/>
+          </a:prstGeom>
+        </p:spPr>
+      </p:pic>
+      <p:sp>
+        <p:nvSpPr>
+          <p:cNvPr id="4" name="Text 1"/>
+          <p:cNvSpPr/>
+          <p:nvPr/>
+        </p:nvSpPr>
+        <p:spPr>
+          <a:xfrm>
+            <a:off x="5349240" y="1005840"/>
+            <a:ext cx="6522415" cy="731520"/>
+          </a:xfrm>
+          <a:prstGeom prst="rect">
+            <a:avLst/>
+          </a:prstGeom>
+          <a:noFill/>
+          <a:ln/>
+        </p:spPr>
+        <p:txBody>
+          <a:bodyPr wrap="square" lIns="0" tIns="0" rIns="0" bIns="0" rtlCol="0" anchor="ctr">
+            <a:normAutofit/>
+          </a:bodyPr>
+          <a:lstStyle/>
+          <a:p>
+            <a:pPr algn="ctr" indent="0" marL="0">
+              <a:buNone/>
+            </a:pPr>
+            <a:r>
+              <a:rPr lang="en-US" sz="3600" b="1" dirty="0">
+                <a:solidFill>
+                  <a:srgbClr val="990011"/>
+                </a:solidFill>
+                <a:latin typeface="Times New Roman" pitchFamily="34" charset="0"/>
+                <a:ea typeface="Times New Roman" pitchFamily="34" charset="-122"/>
+                <a:cs typeface="Times New Roman" pitchFamily="34" charset="-120"/>
+              </a:rPr>
+              <a:t>Correction: Possible Answer</a:t>
+            </a:r>
+            <a:endParaRPr lang="en-US" sz="3600" dirty="0"/>
+          </a:p>
+        </p:txBody>
+      </p:sp>
+      <p:sp>
+        <p:nvSpPr>
+          <p:cNvPr id="5" name="Text 2"/>
+          <p:cNvSpPr/>
+          <p:nvPr/>
+        </p:nvSpPr>
+        <p:spPr>
+          <a:xfrm>
+            <a:off x="5349240" y="1783080"/>
+            <a:ext cx="6522415" cy="4663440"/>
+          </a:xfrm>
+          <a:prstGeom prst="rect">
+            <a:avLst/>
+          </a:prstGeom>
+          <a:noFill/>
+          <a:ln/>
+        </p:spPr>
+        <p:txBody>
+          <a:bodyPr wrap="square" lIns="0" tIns="0" rIns="0" bIns="0" rtlCol="0" anchor="t"/>
+          <a:lstStyle/>
+          <a:p>
+            <a:pPr algn="l" indent="0" marL="0">
+              <a:spcAft>
+                <a:spcPts val="800"/>
+              </a:spcAft>
+              <a:buNone/>
+            </a:pPr>
+            <a:r>
+              <a:rPr lang="en-US" sz="4000" dirty="0">
+                <a:solidFill>
+                  <a:srgbClr val="111111"/>
+                </a:solidFill>
+                <a:latin typeface="Times New Roman" pitchFamily="34" charset="0"/>
+                <a:ea typeface="Times New Roman" pitchFamily="34" charset="-122"/>
+                <a:cs typeface="Times New Roman" pitchFamily="34" charset="-120"/>
+              </a:rPr>
+              <a:t>Learn technical skills, create small businesses or cooperatives, buy local products, and refuse corruption (also take part in community work).</a:t>
+            </a:r>
+            <a:endParaRPr lang="en-US" sz="4000" dirty="0"/>
+          </a:p>
+        </p:txBody>
+      </p:sp>
+      <p:sp>
+        <p:nvSpPr>
+          <p:cNvPr id="25" name="Slide Number Placeholder 0"/>
+          <p:cNvSpPr>
+            <a:spLocks noGrp="1"/>
+          </p:cNvSpPr>
+          <p:nvPr>
+            <p:ph type="sldNum" sz="quarter" idx="4294967295"/>
+          </p:nvPr>
+        </p:nvSpPr>
+        <p:spPr>
+          <a:xfrm>
+            <a:off x="27432" y="91440"/>
+            <a:ext cx="585216" cy="475488"/>
+          </a:xfrm>
+          <a:prstGeom prst="rect">
+            <a:avLst/>
+          </a:prstGeom>
+          <a:extLst>
+            <a:ext uri="{C572A759-6A51-4108-AA02-DFA0A04FC94B}">
+              <ma14:wrappingTextBoxFlag xmlns:ma14="http://schemas.microsoft.com/office/mac/drawingml/2011/main" val="0"/>
+            </a:ext>
+          </a:extLst>
+        </p:spPr>
+        <p:txBody>
+          <a:bodyPr/>
+          <a:lstStyle>
+            <a:lvl1pPr>
+              <a:defRPr sz="2000">
+                <a:solidFill>
+                  <a:srgbClr val="FFFFFF"/>
+                </a:solidFill>
+                <a:latin typeface="Calibri"/>
+                <a:ea typeface="Calibri"/>
+                <a:cs typeface="Calibri"/>
+              </a:defRPr>
+            </a:lvl1pPr>
+          </a:lstStyle>
+          <a:p>
+            <a:pPr algn="ctr"/>
+            <a:fld id="{F7021451-1387-4CA6-816F-3879F97B5CBC}" type="slidenum">
+              <a:rPr b="1" lang="en-US"/>
+              <a:t>5</a:t>
+            </a:fld>
+            <a:endParaRPr lang="en-US"/>
+          </a:p>
+        </p:txBody>
+      </p:sp>
+    </p:spTree>
+  </p:cSld>
+  <p:clrMapOvr>
+    <a:masterClrMapping/>
+  </p:clrMapOvr>
+</p:sld>
+</file>
+
+<file path=ppt/slides/slide50.xml><?xml version="1.0" encoding="utf-8"?>
+<p:sld xmlns:a="http://schemas.openxmlformats.org/drawingml/2006/main" xmlns:r="http://schemas.openxmlformats.org/officeDocument/2006/relationships" xmlns:p="http://schemas.openxmlformats.org/presentationml/2006/main">
+  <p:cSld name="Slide 50">
+    <p:spTree>
+      <p:nvGrpSpPr>
+        <p:cNvPr id="1" name=""/>
+        <p:cNvGrpSpPr/>
+        <p:nvPr/>
+      </p:nvGrpSpPr>
+      <p:grpSpPr>
+        <a:xfrm>
+          <a:off x="0" y="0"/>
+          <a:ext cx="0" cy="0"/>
+          <a:chOff x="0" y="0"/>
+          <a:chExt cx="0" cy="0"/>
+        </a:xfrm>
+      </p:grpSpPr>
+      <p:sp>
+        <p:nvSpPr>
+          <p:cNvPr id="2" name="Text 0"/>
+          <p:cNvSpPr/>
+          <p:nvPr/>
+        </p:nvSpPr>
+        <p:spPr>
+          <a:xfrm>
+            <a:off x="457200" y="713232"/>
+            <a:ext cx="11368735" cy="274320"/>
+          </a:xfrm>
+          <a:prstGeom prst="rect">
+            <a:avLst/>
+          </a:prstGeom>
+          <a:noFill/>
+          <a:ln/>
+        </p:spPr>
+        <p:txBody>
+          <a:bodyPr wrap="square" lIns="0" tIns="0" rIns="0" bIns="0" rtlCol="0" anchor="ctr"/>
+          <a:lstStyle/>
+          <a:p>
+            <a:pPr algn="r" indent="0" marL="0">
+              <a:buNone/>
+            </a:pPr>
+            <a:r>
+              <a:rPr lang="en-US" sz="1400" b="1" dirty="0">
+                <a:solidFill>
+                  <a:srgbClr val="1C3F6E"/>
+                </a:solidFill>
+                <a:latin typeface="Calibri" pitchFamily="34" charset="0"/>
+                <a:ea typeface="Calibri" pitchFamily="34" charset="-122"/>
+                <a:cs typeface="Calibri" pitchFamily="34" charset="-120"/>
+              </a:rPr>
               <a:t>LOGBOOK</a:t>
             </a:r>
             <a:endParaRPr lang="en-US" sz="1400" dirty="0"/>
@@ -18534,7 +19252,7 @@
       </p:sp>
       <p:graphicFrame>
         <p:nvGraphicFramePr>
-          <p:cNvPr id="50" name="Table 0"/>
+          <p:cNvPr id="51" name="Table 0"/>
           <p:cNvGraphicFramePr>
             <a:graphicFrameLocks noGrp="1"/>
           </p:cNvGraphicFramePr>
@@ -18644,7 +19362,7 @@
                           <a:ea typeface="Calibri" pitchFamily="34" charset="-122"/>
                           <a:cs typeface="Calibri" pitchFamily="34" charset="-120"/>
                         </a:rPr>
-                        <a:t>DEFINITIONS; Examples of Land Reclamation Schemes; Advantages, Disadvantages and Challenges.</a:t>
+                        <a:t>DEFINITIONS; Examples of Land Reclamation Schemes; Advantages; Disadvantages and Challenges.</a:t>
                       </a:r>
                       <a:endParaRPr lang="en-US" sz="1600" dirty="0">
                         <a:latin typeface="Calibri" charset="0"/>
@@ -19294,550 +20012,6 @@
             <a:pPr algn="ctr"/>
             <a:fld id="{F7021451-1387-4CA6-816F-3879F97B5CBC}" type="slidenum">
               <a:rPr b="1" lang="en-US"/>
-              <a:t>49</a:t>
-            </a:fld>
-            <a:endParaRPr lang="en-US"/>
-          </a:p>
-        </p:txBody>
-      </p:sp>
-    </p:spTree>
-  </p:cSld>
-  <p:clrMapOvr>
-    <a:masterClrMapping/>
-  </p:clrMapOvr>
-</p:sld>
-</file>
-
-<file path=ppt/slides/slide5.xml><?xml version="1.0" encoding="utf-8"?>
-<p:sld xmlns:a="http://schemas.openxmlformats.org/drawingml/2006/main" xmlns:r="http://schemas.openxmlformats.org/officeDocument/2006/relationships" xmlns:p="http://schemas.openxmlformats.org/presentationml/2006/main">
-  <p:cSld name="Slide 5">
-    <p:spTree>
-      <p:nvGrpSpPr>
-        <p:cNvPr id="1" name=""/>
-        <p:cNvGrpSpPr/>
-        <p:nvPr/>
-      </p:nvGrpSpPr>
-      <p:grpSpPr>
-        <a:xfrm>
-          <a:off x="0" y="0"/>
-          <a:ext cx="0" cy="0"/>
-          <a:chOff x="0" y="0"/>
-          <a:chExt cx="0" cy="0"/>
-        </a:xfrm>
-      </p:grpSpPr>
-      <p:sp>
-        <p:nvSpPr>
-          <p:cNvPr id="2" name="Text 0"/>
-          <p:cNvSpPr/>
-          <p:nvPr/>
-        </p:nvSpPr>
-        <p:spPr>
-          <a:xfrm>
-            <a:off x="457200" y="713232"/>
-            <a:ext cx="11368735" cy="274320"/>
-          </a:xfrm>
-          <a:prstGeom prst="rect">
-            <a:avLst/>
-          </a:prstGeom>
-          <a:noFill/>
-          <a:ln/>
-        </p:spPr>
-        <p:txBody>
-          <a:bodyPr wrap="square" lIns="0" tIns="0" rIns="0" bIns="0" rtlCol="0" anchor="ctr"/>
-          <a:lstStyle/>
-          <a:p>
-            <a:pPr algn="r" indent="0" marL="0">
-              <a:buNone/>
-            </a:pPr>
-            <a:r>
-              <a:rPr lang="en-US" sz="1400" b="1" dirty="0">
-                <a:solidFill>
-                  <a:srgbClr val="1C3F6E"/>
-                </a:solidFill>
-                <a:latin typeface="Calibri" pitchFamily="34" charset="0"/>
-                <a:ea typeface="Calibri" pitchFamily="34" charset="-122"/>
-                <a:cs typeface="Calibri" pitchFamily="34" charset="-120"/>
-              </a:rPr>
-              <a:t>HOMEWORK CORRECTION</a:t>
-            </a:r>
-            <a:endParaRPr lang="en-US" sz="1400" dirty="0"/>
-          </a:p>
-        </p:txBody>
-      </p:sp>
-      <p:pic>
-        <p:nvPicPr>
-          <p:cNvPr id="3" name="Image 0" descr="/home/claude/f4/img/minesec_sheet.png">    </p:cNvPr>
-          <p:cNvPicPr>
-            <a:picLocks noChangeAspect="1"/>
-          </p:cNvPicPr>
-          <p:nvPr/>
-        </p:nvPicPr>
-        <p:blipFill>
-          <a:blip r:embed="rId1"/>
-          <a:stretch>
-            <a:fillRect/>
-          </a:stretch>
-        </p:blipFill>
-        <p:spPr>
-          <a:xfrm>
-            <a:off x="0" y="658368"/>
-            <a:ext cx="5120640" cy="5833872"/>
-          </a:xfrm>
-          <a:prstGeom prst="rect">
-            <a:avLst/>
-          </a:prstGeom>
-        </p:spPr>
-      </p:pic>
-      <p:sp>
-        <p:nvSpPr>
-          <p:cNvPr id="4" name="Text 1"/>
-          <p:cNvSpPr/>
-          <p:nvPr/>
-        </p:nvSpPr>
-        <p:spPr>
-          <a:xfrm>
-            <a:off x="5349240" y="1005840"/>
-            <a:ext cx="6522415" cy="731520"/>
-          </a:xfrm>
-          <a:prstGeom prst="rect">
-            <a:avLst/>
-          </a:prstGeom>
-          <a:noFill/>
-          <a:ln/>
-        </p:spPr>
-        <p:txBody>
-          <a:bodyPr wrap="square" lIns="0" tIns="0" rIns="0" bIns="0" rtlCol="0" anchor="ctr">
-            <a:normAutofit/>
-          </a:bodyPr>
-          <a:lstStyle/>
-          <a:p>
-            <a:pPr algn="ctr" indent="0" marL="0">
-              <a:buNone/>
-            </a:pPr>
-            <a:r>
-              <a:rPr lang="en-US" sz="3600" b="1" dirty="0">
-                <a:solidFill>
-                  <a:srgbClr val="990011"/>
-                </a:solidFill>
-                <a:latin typeface="Times New Roman" pitchFamily="34" charset="0"/>
-                <a:ea typeface="Times New Roman" pitchFamily="34" charset="-122"/>
-                <a:cs typeface="Times New Roman" pitchFamily="34" charset="-120"/>
-              </a:rPr>
-              <a:t>Correction: Possible Answer</a:t>
-            </a:r>
-            <a:endParaRPr lang="en-US" sz="3600" dirty="0"/>
-          </a:p>
-        </p:txBody>
-      </p:sp>
-      <p:sp>
-        <p:nvSpPr>
-          <p:cNvPr id="5" name="Text 2"/>
-          <p:cNvSpPr/>
-          <p:nvPr/>
-        </p:nvSpPr>
-        <p:spPr>
-          <a:xfrm>
-            <a:off x="5349240" y="1783080"/>
-            <a:ext cx="6522415" cy="4663440"/>
-          </a:xfrm>
-          <a:prstGeom prst="rect">
-            <a:avLst/>
-          </a:prstGeom>
-          <a:noFill/>
-          <a:ln/>
-        </p:spPr>
-        <p:txBody>
-          <a:bodyPr wrap="square" lIns="0" tIns="0" rIns="0" bIns="0" rtlCol="0" anchor="t"/>
-          <a:lstStyle/>
-          <a:p>
-            <a:pPr algn="l" indent="0" marL="0">
-              <a:spcAft>
-                <a:spcPts val="800"/>
-              </a:spcAft>
-              <a:buNone/>
-            </a:pPr>
-            <a:r>
-              <a:rPr lang="en-US" sz="4000" dirty="0">
-                <a:solidFill>
-                  <a:srgbClr val="111111"/>
-                </a:solidFill>
-                <a:latin typeface="Times New Roman" pitchFamily="34" charset="0"/>
-                <a:ea typeface="Times New Roman" pitchFamily="34" charset="-122"/>
-                <a:cs typeface="Times New Roman" pitchFamily="34" charset="-120"/>
-              </a:rPr>
-              <a:t>Learn technical skills, create small businesses or cooperatives, buy local products, and refuse corruption (also take part in community work).</a:t>
-            </a:r>
-            <a:endParaRPr lang="en-US" sz="4000" dirty="0"/>
-          </a:p>
-        </p:txBody>
-      </p:sp>
-      <p:sp>
-        <p:nvSpPr>
-          <p:cNvPr id="25" name="Slide Number Placeholder 0"/>
-          <p:cNvSpPr>
-            <a:spLocks noGrp="1"/>
-          </p:cNvSpPr>
-          <p:nvPr>
-            <p:ph type="sldNum" sz="quarter" idx="4294967295"/>
-          </p:nvPr>
-        </p:nvSpPr>
-        <p:spPr>
-          <a:xfrm>
-            <a:off x="27432" y="91440"/>
-            <a:ext cx="585216" cy="475488"/>
-          </a:xfrm>
-          <a:prstGeom prst="rect">
-            <a:avLst/>
-          </a:prstGeom>
-          <a:extLst>
-            <a:ext uri="{C572A759-6A51-4108-AA02-DFA0A04FC94B}">
-              <ma14:wrappingTextBoxFlag xmlns:ma14="http://schemas.microsoft.com/office/mac/drawingml/2011/main" val="0"/>
-            </a:ext>
-          </a:extLst>
-        </p:spPr>
-        <p:txBody>
-          <a:bodyPr/>
-          <a:lstStyle>
-            <a:lvl1pPr>
-              <a:defRPr sz="2000">
-                <a:solidFill>
-                  <a:srgbClr val="FFFFFF"/>
-                </a:solidFill>
-                <a:latin typeface="Calibri"/>
-                <a:ea typeface="Calibri"/>
-                <a:cs typeface="Calibri"/>
-              </a:defRPr>
-            </a:lvl1pPr>
-          </a:lstStyle>
-          <a:p>
-            <a:pPr algn="ctr"/>
-            <a:fld id="{F7021451-1387-4CA6-816F-3879F97B5CBC}" type="slidenum">
-              <a:rPr b="1" lang="en-US"/>
-              <a:t>5</a:t>
-            </a:fld>
-            <a:endParaRPr lang="en-US"/>
-          </a:p>
-        </p:txBody>
-      </p:sp>
-    </p:spTree>
-  </p:cSld>
-  <p:clrMapOvr>
-    <a:masterClrMapping/>
-  </p:clrMapOvr>
-</p:sld>
-</file>
-
-<file path=ppt/slides/slide50.xml><?xml version="1.0" encoding="utf-8"?>
-<p:sld xmlns:a="http://schemas.openxmlformats.org/drawingml/2006/main" xmlns:r="http://schemas.openxmlformats.org/officeDocument/2006/relationships" xmlns:p="http://schemas.openxmlformats.org/presentationml/2006/main">
-  <p:cSld name="Slide 50">
-    <p:spTree>
-      <p:nvGrpSpPr>
-        <p:cNvPr id="1" name=""/>
-        <p:cNvGrpSpPr/>
-        <p:nvPr/>
-      </p:nvGrpSpPr>
-      <p:grpSpPr>
-        <a:xfrm>
-          <a:off x="0" y="0"/>
-          <a:ext cx="0" cy="0"/>
-          <a:chOff x="0" y="0"/>
-          <a:chExt cx="0" cy="0"/>
-        </a:xfrm>
-      </p:grpSpPr>
-      <p:sp>
-        <p:nvSpPr>
-          <p:cNvPr id="2" name="Text 0"/>
-          <p:cNvSpPr/>
-          <p:nvPr/>
-        </p:nvSpPr>
-        <p:spPr>
-          <a:xfrm>
-            <a:off x="457200" y="713232"/>
-            <a:ext cx="11368735" cy="274320"/>
-          </a:xfrm>
-          <a:prstGeom prst="rect">
-            <a:avLst/>
-          </a:prstGeom>
-          <a:noFill/>
-          <a:ln/>
-        </p:spPr>
-        <p:txBody>
-          <a:bodyPr wrap="square" lIns="0" tIns="0" rIns="0" bIns="0" rtlCol="0" anchor="ctr"/>
-          <a:lstStyle/>
-          <a:p>
-            <a:pPr algn="r" indent="0" marL="0">
-              <a:buNone/>
-            </a:pPr>
-            <a:r>
-              <a:rPr lang="en-US" sz="1400" b="1" dirty="0">
-                <a:solidFill>
-                  <a:srgbClr val="1C3F6E"/>
-                </a:solidFill>
-                <a:latin typeface="Calibri" pitchFamily="34" charset="0"/>
-                <a:ea typeface="Calibri" pitchFamily="34" charset="-122"/>
-                <a:cs typeface="Calibri" pitchFamily="34" charset="-120"/>
-              </a:rPr>
-              <a:t>TEACHER'S NOTE</a:t>
-            </a:r>
-            <a:endParaRPr lang="en-US" sz="1400" dirty="0"/>
-          </a:p>
-        </p:txBody>
-      </p:sp>
-      <p:pic>
-        <p:nvPicPr>
-          <p:cNvPr id="3" name="Image 0" descr="/home/claude/f4/img/minesec_sheet.png">    </p:cNvPr>
-          <p:cNvPicPr>
-            <a:picLocks noChangeAspect="1"/>
-          </p:cNvPicPr>
-          <p:nvPr/>
-        </p:nvPicPr>
-        <p:blipFill>
-          <a:blip r:embed="rId1"/>
-          <a:stretch>
-            <a:fillRect/>
-          </a:stretch>
-        </p:blipFill>
-        <p:spPr>
-          <a:xfrm>
-            <a:off x="0" y="658368"/>
-            <a:ext cx="5120640" cy="5833872"/>
-          </a:xfrm>
-          <a:prstGeom prst="rect">
-            <a:avLst/>
-          </a:prstGeom>
-        </p:spPr>
-      </p:pic>
-      <p:sp>
-        <p:nvSpPr>
-          <p:cNvPr id="4" name="Text 1"/>
-          <p:cNvSpPr/>
-          <p:nvPr/>
-        </p:nvSpPr>
-        <p:spPr>
-          <a:xfrm>
-            <a:off x="5349240" y="1005840"/>
-            <a:ext cx="6522415" cy="731520"/>
-          </a:xfrm>
-          <a:prstGeom prst="rect">
-            <a:avLst/>
-          </a:prstGeom>
-          <a:noFill/>
-          <a:ln/>
-        </p:spPr>
-        <p:txBody>
-          <a:bodyPr wrap="square" lIns="0" tIns="0" rIns="0" bIns="0" rtlCol="0" anchor="ctr">
-            <a:normAutofit/>
-          </a:bodyPr>
-          <a:lstStyle/>
-          <a:p>
-            <a:pPr algn="ctr" indent="0" marL="0">
-              <a:buNone/>
-            </a:pPr>
-            <a:r>
-              <a:rPr lang="en-US" sz="3600" b="1" dirty="0">
-                <a:solidFill>
-                  <a:srgbClr val="990011"/>
-                </a:solidFill>
-                <a:latin typeface="Times New Roman" pitchFamily="34" charset="0"/>
-                <a:ea typeface="Times New Roman" pitchFamily="34" charset="-122"/>
-                <a:cs typeface="Times New Roman" pitchFamily="34" charset="-120"/>
-              </a:rPr>
-              <a:t>Teacher's Note</a:t>
-            </a:r>
-            <a:endParaRPr lang="en-US" sz="3600" dirty="0"/>
-          </a:p>
-        </p:txBody>
-      </p:sp>
-      <p:sp>
-        <p:nvSpPr>
-          <p:cNvPr id="5" name="Text 2"/>
-          <p:cNvSpPr/>
-          <p:nvPr/>
-        </p:nvSpPr>
-        <p:spPr>
-          <a:xfrm>
-            <a:off x="5349240" y="1783080"/>
-            <a:ext cx="6522415" cy="4663440"/>
-          </a:xfrm>
-          <a:prstGeom prst="rect">
-            <a:avLst/>
-          </a:prstGeom>
-          <a:noFill/>
-          <a:ln/>
-        </p:spPr>
-        <p:txBody>
-          <a:bodyPr wrap="square" lIns="0" tIns="0" rIns="0" bIns="0" rtlCol="0" anchor="t"/>
-          <a:lstStyle/>
-          <a:p>
-            <a:pPr algn="l" marL="342900" indent="-342900">
-              <a:spcAft>
-                <a:spcPts val="800"/>
-              </a:spcAft>
-              <a:buSzPct val="100000"/>
-              <a:buChar char="•"/>
-            </a:pPr>
-            <a:r>
-              <a:rPr lang="en-US" sz="2000" dirty="0">
-                <a:solidFill>
-                  <a:srgbClr val="111111"/>
-                </a:solidFill>
-                <a:latin typeface="Calibri" pitchFamily="34" charset="0"/>
-                <a:ea typeface="Calibri" pitchFamily="34" charset="-122"/>
-                <a:cs typeface="Calibri" pitchFamily="34" charset="-120"/>
-              </a:rPr>
-              <a:t>Timing: Homework correction, plan, objectives 8 min | Recall, situation, action 10 min | 5 activities 30 min | Board summary (copying) 30 min | Evaluation, remediation 10 min | Homework, next lesson 5 min | Logbook 7 min</a:t>
-            </a:r>
-            <a:endParaRPr lang="en-US" sz="2000" dirty="0"/>
-          </a:p>
-          <a:p>
-            <a:pPr algn="l" marL="342900" indent="-342900">
-              <a:spcAft>
-                <a:spcPts val="800"/>
-              </a:spcAft>
-              <a:buSzPct val="100000"/>
-              <a:buChar char="•"/>
-            </a:pPr>
-            <a:r>
-              <a:rPr lang="en-US" sz="2000" dirty="0">
-                <a:solidFill>
-                  <a:srgbClr val="111111"/>
-                </a:solidFill>
-                <a:latin typeface="Calibri" pitchFamily="34" charset="0"/>
-                <a:ea typeface="Calibri" pitchFamily="34" charset="-122"/>
-                <a:cs typeface="Calibri" pitchFamily="34" charset="-120"/>
-              </a:rPr>
-              <a:t>Without the projector (Activity 1): discuss.</a:t>
-            </a:r>
-            <a:endParaRPr lang="en-US" sz="2000" dirty="0"/>
-          </a:p>
-          <a:p>
-            <a:pPr algn="l" marL="342900" indent="-342900">
-              <a:spcAft>
-                <a:spcPts val="800"/>
-              </a:spcAft>
-              <a:buSzPct val="100000"/>
-              <a:buChar char="•"/>
-            </a:pPr>
-            <a:r>
-              <a:rPr lang="en-US" sz="2000" dirty="0">
-                <a:solidFill>
-                  <a:srgbClr val="111111"/>
-                </a:solidFill>
-                <a:latin typeface="Calibri" pitchFamily="34" charset="0"/>
-                <a:ea typeface="Calibri" pitchFamily="34" charset="-122"/>
-                <a:cs typeface="Calibri" pitchFamily="34" charset="-120"/>
-              </a:rPr>
-              <a:t>Without the projector (Activity 2): describe.</a:t>
-            </a:r>
-            <a:endParaRPr lang="en-US" sz="2000" dirty="0"/>
-          </a:p>
-          <a:p>
-            <a:pPr algn="l" marL="342900" indent="-342900">
-              <a:spcAft>
-                <a:spcPts val="800"/>
-              </a:spcAft>
-              <a:buSzPct val="100000"/>
-              <a:buChar char="•"/>
-            </a:pPr>
-            <a:r>
-              <a:rPr lang="en-US" sz="2000" dirty="0">
-                <a:solidFill>
-                  <a:srgbClr val="111111"/>
-                </a:solidFill>
-                <a:latin typeface="Calibri" pitchFamily="34" charset="0"/>
-                <a:ea typeface="Calibri" pitchFamily="34" charset="-122"/>
-                <a:cs typeface="Calibri" pitchFamily="34" charset="-120"/>
-              </a:rPr>
-              <a:t>Without the projector (Activity 3): list.</a:t>
-            </a:r>
-            <a:endParaRPr lang="en-US" sz="2000" dirty="0"/>
-          </a:p>
-          <a:p>
-            <a:pPr algn="l" marL="342900" indent="-342900">
-              <a:spcAft>
-                <a:spcPts val="800"/>
-              </a:spcAft>
-              <a:buSzPct val="100000"/>
-              <a:buChar char="•"/>
-            </a:pPr>
-            <a:r>
-              <a:rPr lang="en-US" sz="2000" dirty="0">
-                <a:solidFill>
-                  <a:srgbClr val="111111"/>
-                </a:solidFill>
-                <a:latin typeface="Calibri" pitchFamily="34" charset="0"/>
-                <a:ea typeface="Calibri" pitchFamily="34" charset="-122"/>
-                <a:cs typeface="Calibri" pitchFamily="34" charset="-120"/>
-              </a:rPr>
-              <a:t>Without the projector (Activity 4): discuss.</a:t>
-            </a:r>
-            <a:endParaRPr lang="en-US" sz="2000" dirty="0"/>
-          </a:p>
-          <a:p>
-            <a:pPr algn="l" marL="342900" indent="-342900">
-              <a:spcAft>
-                <a:spcPts val="800"/>
-              </a:spcAft>
-              <a:buSzPct val="100000"/>
-              <a:buChar char="•"/>
-            </a:pPr>
-            <a:r>
-              <a:rPr lang="en-US" sz="2000" dirty="0">
-                <a:solidFill>
-                  <a:srgbClr val="111111"/>
-                </a:solidFill>
-                <a:latin typeface="Calibri" pitchFamily="34" charset="0"/>
-                <a:ea typeface="Calibri" pitchFamily="34" charset="-122"/>
-                <a:cs typeface="Calibri" pitchFamily="34" charset="-120"/>
-              </a:rPr>
-              <a:t>Without the projector (Activity 5): discuss.</a:t>
-            </a:r>
-            <a:endParaRPr lang="en-US" sz="2000" dirty="0"/>
-          </a:p>
-        </p:txBody>
-      </p:sp>
-      <p:sp>
-        <p:nvSpPr>
-          <p:cNvPr id="25" name="Slide Number Placeholder 0"/>
-          <p:cNvSpPr>
-            <a:spLocks noGrp="1"/>
-          </p:cNvSpPr>
-          <p:nvPr>
-            <p:ph type="sldNum" sz="quarter" idx="4294967295"/>
-          </p:nvPr>
-        </p:nvSpPr>
-        <p:spPr>
-          <a:xfrm>
-            <a:off x="27432" y="91440"/>
-            <a:ext cx="585216" cy="475488"/>
-          </a:xfrm>
-          <a:prstGeom prst="rect">
-            <a:avLst/>
-          </a:prstGeom>
-          <a:extLst>
-            <a:ext uri="{C572A759-6A51-4108-AA02-DFA0A04FC94B}">
-              <ma14:wrappingTextBoxFlag xmlns:ma14="http://schemas.microsoft.com/office/mac/drawingml/2011/main" val="0"/>
-            </a:ext>
-          </a:extLst>
-        </p:spPr>
-        <p:txBody>
-          <a:bodyPr/>
-          <a:lstStyle>
-            <a:lvl1pPr>
-              <a:defRPr sz="2000">
-                <a:solidFill>
-                  <a:srgbClr val="FFFFFF"/>
-                </a:solidFill>
-                <a:latin typeface="Calibri"/>
-                <a:ea typeface="Calibri"/>
-                <a:cs typeface="Calibri"/>
-              </a:defRPr>
-            </a:lvl1pPr>
-          </a:lstStyle>
-          <a:p>
-            <a:pPr algn="ctr"/>
-            <a:fld id="{F7021451-1387-4CA6-816F-3879F97B5CBC}" type="slidenum">
-              <a:rPr b="1" lang="en-US"/>
               <a:t>50</a:t>
             </a:fld>
             <a:endParaRPr lang="en-US"/>
@@ -19902,7 +20076,7 @@
                 <a:ea typeface="Calibri" pitchFamily="34" charset="-122"/>
                 <a:cs typeface="Calibri" pitchFamily="34" charset="-120"/>
               </a:rPr>
-              <a:t>REFERENCES</a:t>
+              <a:t>TEACHER'S NOTE</a:t>
             </a:r>
             <a:endParaRPr lang="en-US" sz="1400" dirty="0"/>
           </a:p>
@@ -19925,7 +20099,7 @@
         <p:spPr>
           <a:xfrm>
             <a:off x="0" y="658368"/>
-            <a:ext cx="3840480" cy="5833872"/>
+            <a:ext cx="5120640" cy="5833872"/>
           </a:xfrm>
           <a:prstGeom prst="rect">
             <a:avLst/>
@@ -19940,8 +20114,8 @@
         </p:nvSpPr>
         <p:spPr>
           <a:xfrm>
-            <a:off x="4069080" y="1005840"/>
-            <a:ext cx="7802575" cy="731520"/>
+            <a:off x="5349240" y="1005840"/>
+            <a:ext cx="6522415" cy="731520"/>
           </a:xfrm>
           <a:prstGeom prst="rect">
             <a:avLst/>
@@ -19967,7 +20141,7 @@
                 <a:ea typeface="Times New Roman" pitchFamily="34" charset="-122"/>
                 <a:cs typeface="Times New Roman" pitchFamily="34" charset="-120"/>
               </a:rPr>
-              <a:t>References</a:t>
+              <a:t>Teacher's Note</a:t>
             </a:r>
             <a:endParaRPr lang="en-US" sz="3600" dirty="0"/>
           </a:p>
@@ -19981,8 +20155,8 @@
         </p:nvSpPr>
         <p:spPr>
           <a:xfrm>
-            <a:off x="4069080" y="1783080"/>
-            <a:ext cx="7802575" cy="4663440"/>
+            <a:off x="5349240" y="1783080"/>
+            <a:ext cx="6522415" cy="4663440"/>
           </a:xfrm>
           <a:prstGeom prst="rect">
             <a:avLst/>
@@ -20002,7 +20176,7 @@
               <a:buChar char="•"/>
             </a:pPr>
             <a:r>
-              <a:rPr lang="en-US" sz="1800" dirty="0">
+              <a:rPr lang="en-US" sz="2000" dirty="0">
                 <a:solidFill>
                   <a:srgbClr val="111111"/>
                 </a:solidFill>
@@ -20010,9 +20184,9 @@
                 <a:ea typeface="Calibri" pitchFamily="34" charset="-122"/>
                 <a:cs typeface="Calibri" pitchFamily="34" charset="-120"/>
               </a:rPr>
-              <a:t>Geography Syllabus, Forms I–V, MINESEC (2023) — Form 5, Module II: Preservation of the Natural Environment.</a:t>
-            </a:r>
-            <a:endParaRPr lang="en-US" sz="1800" dirty="0"/>
+              <a:t>Timing: Homework correction, plan, objectives 8 min | Recall, situation, action 10 min | 5 activities 30 min | Board summary (copying) 30 min | Evaluation, remediation 10 min | Homework, next lesson 5 min | Logbook 7 min</a:t>
+            </a:r>
+            <a:endParaRPr lang="en-US" sz="2000" dirty="0"/>
           </a:p>
           <a:p>
             <a:pPr algn="l" marL="342900" indent="-342900">
@@ -20023,7 +20197,7 @@
               <a:buChar char="•"/>
             </a:pPr>
             <a:r>
-              <a:rPr lang="en-US" sz="1800" dirty="0">
+              <a:rPr lang="en-US" sz="2000" dirty="0">
                 <a:solidFill>
                   <a:srgbClr val="111111"/>
                 </a:solidFill>
@@ -20031,9 +20205,9 @@
                 <a:ea typeface="Calibri" pitchFamily="34" charset="-122"/>
                 <a:cs typeface="Calibri" pitchFamily="34" charset="-120"/>
               </a:rPr>
-              <a:t>Photo, Activity 2: “Mills Kinderdijk, Holland - 3632” by HereIsTom, CC BY-NC-ND 2.0, via Flickr (https://www.flickr.com/photos/47035764@N03/8141380736)</a:t>
-            </a:r>
-            <a:endParaRPr lang="en-US" sz="1800" dirty="0"/>
+              <a:t>Without the projector (Activity 1): discuss.</a:t>
+            </a:r>
+            <a:endParaRPr lang="en-US" sz="2000" dirty="0"/>
           </a:p>
           <a:p>
             <a:pPr algn="l" marL="342900" indent="-342900">
@@ -20044,7 +20218,7 @@
               <a:buChar char="•"/>
             </a:pPr>
             <a:r>
-              <a:rPr lang="en-US" sz="1800" dirty="0">
+              <a:rPr lang="en-US" sz="2000" dirty="0">
                 <a:solidFill>
                   <a:srgbClr val="111111"/>
                 </a:solidFill>
@@ -20052,9 +20226,9 @@
                 <a:ea typeface="Calibri" pitchFamily="34" charset="-122"/>
                 <a:cs typeface="Calibri" pitchFamily="34" charset="-120"/>
               </a:rPr>
-              <a:t>Photo, Activity 3: “Irrigation Canals in Farah Province Afgahnistan” by USAID_IMAGES, CC BY-NC-ND 2.0, via Flickr (https://www.flickr.com/photos/46658241@N06/14784748647)</a:t>
-            </a:r>
-            <a:endParaRPr lang="en-US" sz="1800" dirty="0"/>
+              <a:t>Without the projector (Activity 2): describe.</a:t>
+            </a:r>
+            <a:endParaRPr lang="en-US" sz="2000" dirty="0"/>
           </a:p>
           <a:p>
             <a:pPr algn="l" marL="342900" indent="-342900">
@@ -20065,7 +20239,7 @@
               <a:buChar char="•"/>
             </a:pPr>
             <a:r>
-              <a:rPr lang="en-US" sz="1800" dirty="0">
+              <a:rPr lang="en-US" sz="2000" dirty="0">
                 <a:solidFill>
                   <a:srgbClr val="111111"/>
                 </a:solidFill>
@@ -20073,9 +20247,9 @@
                 <a:ea typeface="Calibri" pitchFamily="34" charset="-122"/>
                 <a:cs typeface="Calibri" pitchFamily="34" charset="-120"/>
               </a:rPr>
-              <a:t>Photo, Activity 4: “Singapore” by Christopher Chan, CC BY-NC-ND 2.0, via Flickr (https://www.flickr.com/photos/17751217@N00/8909326546)</a:t>
-            </a:r>
-            <a:endParaRPr lang="en-US" sz="1800" dirty="0"/>
+              <a:t>Without the projector (Activity 3): list.</a:t>
+            </a:r>
+            <a:endParaRPr lang="en-US" sz="2000" dirty="0"/>
           </a:p>
           <a:p>
             <a:pPr algn="l" marL="342900" indent="-342900">
@@ -20086,7 +20260,7 @@
               <a:buChar char="•"/>
             </a:pPr>
             <a:r>
-              <a:rPr lang="en-US" sz="1800" dirty="0">
+              <a:rPr lang="en-US" sz="2000" dirty="0">
                 <a:solidFill>
                   <a:srgbClr val="111111"/>
                 </a:solidFill>
@@ -20094,9 +20268,9 @@
                 <a:ea typeface="Calibri" pitchFamily="34" charset="-122"/>
                 <a:cs typeface="Calibri" pitchFamily="34" charset="-120"/>
               </a:rPr>
-              <a:t>Photo, Activity 5: “Flood in Accra” by Stig Nygaard, CC BY 2.0, via Flickr (https://www.flickr.com/photos/10259776@N00/181742000)</a:t>
-            </a:r>
-            <a:endParaRPr lang="en-US" sz="1800" dirty="0"/>
+              <a:t>Without the projector (Activity 4): discuss.</a:t>
+            </a:r>
+            <a:endParaRPr lang="en-US" sz="2000" dirty="0"/>
           </a:p>
           <a:p>
             <a:pPr algn="l" marL="342900" indent="-342900">
@@ -20107,7 +20281,7 @@
               <a:buChar char="•"/>
             </a:pPr>
             <a:r>
-              <a:rPr lang="en-US" sz="1800" dirty="0">
+              <a:rPr lang="en-US" sz="2000" dirty="0">
                 <a:solidFill>
                   <a:srgbClr val="111111"/>
                 </a:solidFill>
@@ -20115,9 +20289,9 @@
                 <a:ea typeface="Calibri" pitchFamily="34" charset="-122"/>
                 <a:cs typeface="Calibri" pitchFamily="34" charset="-120"/>
               </a:rPr>
-              <a:t>Diagrams and animations: drawn for this lesson (Geography Department).</a:t>
-            </a:r>
-            <a:endParaRPr lang="en-US" sz="1800" dirty="0"/>
+              <a:t>Without the projector (Activity 5): discuss.</a:t>
+            </a:r>
+            <a:endParaRPr lang="en-US" sz="2000" dirty="0"/>
           </a:p>
         </p:txBody>
       </p:sp>
@@ -20164,6 +20338,331 @@
             <a:fld id="{F7021451-1387-4CA6-816F-3879F97B5CBC}" type="slidenum">
               <a:rPr b="1" lang="en-US"/>
               <a:t>51</a:t>
+            </a:fld>
+            <a:endParaRPr lang="en-US"/>
+          </a:p>
+        </p:txBody>
+      </p:sp>
+    </p:spTree>
+  </p:cSld>
+  <p:clrMapOvr>
+    <a:masterClrMapping/>
+  </p:clrMapOvr>
+</p:sld>
+</file>
+
+<file path=ppt/slides/slide52.xml><?xml version="1.0" encoding="utf-8"?>
+<p:sld xmlns:a="http://schemas.openxmlformats.org/drawingml/2006/main" xmlns:r="http://schemas.openxmlformats.org/officeDocument/2006/relationships" xmlns:p="http://schemas.openxmlformats.org/presentationml/2006/main">
+  <p:cSld name="Slide 52">
+    <p:spTree>
+      <p:nvGrpSpPr>
+        <p:cNvPr id="1" name=""/>
+        <p:cNvGrpSpPr/>
+        <p:nvPr/>
+      </p:nvGrpSpPr>
+      <p:grpSpPr>
+        <a:xfrm>
+          <a:off x="0" y="0"/>
+          <a:ext cx="0" cy="0"/>
+          <a:chOff x="0" y="0"/>
+          <a:chExt cx="0" cy="0"/>
+        </a:xfrm>
+      </p:grpSpPr>
+      <p:sp>
+        <p:nvSpPr>
+          <p:cNvPr id="2" name="Text 0"/>
+          <p:cNvSpPr/>
+          <p:nvPr/>
+        </p:nvSpPr>
+        <p:spPr>
+          <a:xfrm>
+            <a:off x="457200" y="713232"/>
+            <a:ext cx="11368735" cy="274320"/>
+          </a:xfrm>
+          <a:prstGeom prst="rect">
+            <a:avLst/>
+          </a:prstGeom>
+          <a:noFill/>
+          <a:ln/>
+        </p:spPr>
+        <p:txBody>
+          <a:bodyPr wrap="square" lIns="0" tIns="0" rIns="0" bIns="0" rtlCol="0" anchor="ctr"/>
+          <a:lstStyle/>
+          <a:p>
+            <a:pPr algn="r" indent="0" marL="0">
+              <a:buNone/>
+            </a:pPr>
+            <a:r>
+              <a:rPr lang="en-US" sz="1400" b="1" dirty="0">
+                <a:solidFill>
+                  <a:srgbClr val="1C3F6E"/>
+                </a:solidFill>
+                <a:latin typeface="Calibri" pitchFamily="34" charset="0"/>
+                <a:ea typeface="Calibri" pitchFamily="34" charset="-122"/>
+                <a:cs typeface="Calibri" pitchFamily="34" charset="-120"/>
+              </a:rPr>
+              <a:t>REFERENCES</a:t>
+            </a:r>
+            <a:endParaRPr lang="en-US" sz="1400" dirty="0"/>
+          </a:p>
+        </p:txBody>
+      </p:sp>
+      <p:pic>
+        <p:nvPicPr>
+          <p:cNvPr id="3" name="Image 0" descr="/home/claude/f4/img/minesec_sheet.png">    </p:cNvPr>
+          <p:cNvPicPr>
+            <a:picLocks noChangeAspect="1"/>
+          </p:cNvPicPr>
+          <p:nvPr/>
+        </p:nvPicPr>
+        <p:blipFill>
+          <a:blip r:embed="rId1"/>
+          <a:stretch>
+            <a:fillRect/>
+          </a:stretch>
+        </p:blipFill>
+        <p:spPr>
+          <a:xfrm>
+            <a:off x="0" y="658368"/>
+            <a:ext cx="3840480" cy="5833872"/>
+          </a:xfrm>
+          <a:prstGeom prst="rect">
+            <a:avLst/>
+          </a:prstGeom>
+        </p:spPr>
+      </p:pic>
+      <p:sp>
+        <p:nvSpPr>
+          <p:cNvPr id="4" name="Text 1"/>
+          <p:cNvSpPr/>
+          <p:nvPr/>
+        </p:nvSpPr>
+        <p:spPr>
+          <a:xfrm>
+            <a:off x="4069080" y="1005840"/>
+            <a:ext cx="7802575" cy="731520"/>
+          </a:xfrm>
+          <a:prstGeom prst="rect">
+            <a:avLst/>
+          </a:prstGeom>
+          <a:noFill/>
+          <a:ln/>
+        </p:spPr>
+        <p:txBody>
+          <a:bodyPr wrap="square" lIns="0" tIns="0" rIns="0" bIns="0" rtlCol="0" anchor="ctr">
+            <a:normAutofit/>
+          </a:bodyPr>
+          <a:lstStyle/>
+          <a:p>
+            <a:pPr algn="ctr" indent="0" marL="0">
+              <a:buNone/>
+            </a:pPr>
+            <a:r>
+              <a:rPr lang="en-US" sz="3600" b="1" dirty="0">
+                <a:solidFill>
+                  <a:srgbClr val="990011"/>
+                </a:solidFill>
+                <a:latin typeface="Times New Roman" pitchFamily="34" charset="0"/>
+                <a:ea typeface="Times New Roman" pitchFamily="34" charset="-122"/>
+                <a:cs typeface="Times New Roman" pitchFamily="34" charset="-120"/>
+              </a:rPr>
+              <a:t>References</a:t>
+            </a:r>
+            <a:endParaRPr lang="en-US" sz="3600" dirty="0"/>
+          </a:p>
+        </p:txBody>
+      </p:sp>
+      <p:sp>
+        <p:nvSpPr>
+          <p:cNvPr id="5" name="Text 2"/>
+          <p:cNvSpPr/>
+          <p:nvPr/>
+        </p:nvSpPr>
+        <p:spPr>
+          <a:xfrm>
+            <a:off x="4069080" y="1783080"/>
+            <a:ext cx="7802575" cy="4663440"/>
+          </a:xfrm>
+          <a:prstGeom prst="rect">
+            <a:avLst/>
+          </a:prstGeom>
+          <a:noFill/>
+          <a:ln/>
+        </p:spPr>
+        <p:txBody>
+          <a:bodyPr wrap="square" lIns="0" tIns="0" rIns="0" bIns="0" rtlCol="0" anchor="t"/>
+          <a:lstStyle/>
+          <a:p>
+            <a:pPr algn="l" marL="342900" indent="-342900">
+              <a:spcAft>
+                <a:spcPts val="800"/>
+              </a:spcAft>
+              <a:buSzPct val="100000"/>
+              <a:buChar char="•"/>
+            </a:pPr>
+            <a:r>
+              <a:rPr lang="en-US" sz="1800" dirty="0">
+                <a:solidFill>
+                  <a:srgbClr val="111111"/>
+                </a:solidFill>
+                <a:latin typeface="Calibri" pitchFamily="34" charset="0"/>
+                <a:ea typeface="Calibri" pitchFamily="34" charset="-122"/>
+                <a:cs typeface="Calibri" pitchFamily="34" charset="-120"/>
+              </a:rPr>
+              <a:t>Geography Syllabus, Forms I–V, MINESEC (2023) — Form 5, Module II: Preservation of the Natural Environment.</a:t>
+            </a:r>
+            <a:endParaRPr lang="en-US" sz="1800" dirty="0"/>
+          </a:p>
+          <a:p>
+            <a:pPr algn="l" marL="342900" indent="-342900">
+              <a:spcAft>
+                <a:spcPts val="800"/>
+              </a:spcAft>
+              <a:buSzPct val="100000"/>
+              <a:buChar char="•"/>
+            </a:pPr>
+            <a:r>
+              <a:rPr lang="en-US" sz="1800" dirty="0">
+                <a:solidFill>
+                  <a:srgbClr val="111111"/>
+                </a:solidFill>
+                <a:latin typeface="Calibri" pitchFamily="34" charset="0"/>
+                <a:ea typeface="Calibri" pitchFamily="34" charset="-122"/>
+                <a:cs typeface="Calibri" pitchFamily="34" charset="-120"/>
+              </a:rPr>
+              <a:t>Photo, Activity 2: “Mills Kinderdijk, Holland - 3632” by HereIsTom, CC BY-NC-ND 2.0, via Flickr (https://www.flickr.com/photos/47035764@N03/8141380736)</a:t>
+            </a:r>
+            <a:endParaRPr lang="en-US" sz="1800" dirty="0"/>
+          </a:p>
+          <a:p>
+            <a:pPr algn="l" marL="342900" indent="-342900">
+              <a:spcAft>
+                <a:spcPts val="800"/>
+              </a:spcAft>
+              <a:buSzPct val="100000"/>
+              <a:buChar char="•"/>
+            </a:pPr>
+            <a:r>
+              <a:rPr lang="en-US" sz="1800" dirty="0">
+                <a:solidFill>
+                  <a:srgbClr val="111111"/>
+                </a:solidFill>
+                <a:latin typeface="Calibri" pitchFamily="34" charset="0"/>
+                <a:ea typeface="Calibri" pitchFamily="34" charset="-122"/>
+                <a:cs typeface="Calibri" pitchFamily="34" charset="-120"/>
+              </a:rPr>
+              <a:t>Photo, Activity 3: “Irrigation Canals in Farah Province Afgahnistan” by USAID_IMAGES, CC BY-NC-ND 2.0, via Flickr (https://www.flickr.com/photos/46658241@N06/14784748647)</a:t>
+            </a:r>
+            <a:endParaRPr lang="en-US" sz="1800" dirty="0"/>
+          </a:p>
+          <a:p>
+            <a:pPr algn="l" marL="342900" indent="-342900">
+              <a:spcAft>
+                <a:spcPts val="800"/>
+              </a:spcAft>
+              <a:buSzPct val="100000"/>
+              <a:buChar char="•"/>
+            </a:pPr>
+            <a:r>
+              <a:rPr lang="en-US" sz="1800" dirty="0">
+                <a:solidFill>
+                  <a:srgbClr val="111111"/>
+                </a:solidFill>
+                <a:latin typeface="Calibri" pitchFamily="34" charset="0"/>
+                <a:ea typeface="Calibri" pitchFamily="34" charset="-122"/>
+                <a:cs typeface="Calibri" pitchFamily="34" charset="-120"/>
+              </a:rPr>
+              <a:t>Photo, Activity 4: “Singapore” by Christopher Chan, CC BY-NC-ND 2.0, via Flickr (https://www.flickr.com/photos/17751217@N00/8909326546)</a:t>
+            </a:r>
+            <a:endParaRPr lang="en-US" sz="1800" dirty="0"/>
+          </a:p>
+          <a:p>
+            <a:pPr algn="l" marL="342900" indent="-342900">
+              <a:spcAft>
+                <a:spcPts val="800"/>
+              </a:spcAft>
+              <a:buSzPct val="100000"/>
+              <a:buChar char="•"/>
+            </a:pPr>
+            <a:r>
+              <a:rPr lang="en-US" sz="1800" dirty="0">
+                <a:solidFill>
+                  <a:srgbClr val="111111"/>
+                </a:solidFill>
+                <a:latin typeface="Calibri" pitchFamily="34" charset="0"/>
+                <a:ea typeface="Calibri" pitchFamily="34" charset="-122"/>
+                <a:cs typeface="Calibri" pitchFamily="34" charset="-120"/>
+              </a:rPr>
+              <a:t>Photo, Activity 5: “Flood in Accra” by Stig Nygaard, CC BY 2.0, via Flickr (https://www.flickr.com/photos/10259776@N00/181742000)</a:t>
+            </a:r>
+            <a:endParaRPr lang="en-US" sz="1800" dirty="0"/>
+          </a:p>
+          <a:p>
+            <a:pPr algn="l" marL="342900" indent="-342900">
+              <a:spcAft>
+                <a:spcPts val="800"/>
+              </a:spcAft>
+              <a:buSzPct val="100000"/>
+              <a:buChar char="•"/>
+            </a:pPr>
+            <a:r>
+              <a:rPr lang="en-US" sz="1800" dirty="0">
+                <a:solidFill>
+                  <a:srgbClr val="111111"/>
+                </a:solidFill>
+                <a:latin typeface="Calibri" pitchFamily="34" charset="0"/>
+                <a:ea typeface="Calibri" pitchFamily="34" charset="-122"/>
+                <a:cs typeface="Calibri" pitchFamily="34" charset="-120"/>
+              </a:rPr>
+              <a:t>Diagrams and animations: drawn for this lesson (Geography Department).</a:t>
+            </a:r>
+            <a:endParaRPr lang="en-US" sz="1800" dirty="0"/>
+          </a:p>
+        </p:txBody>
+      </p:sp>
+      <p:sp>
+        <p:nvSpPr>
+          <p:cNvPr id="25" name="Slide Number Placeholder 0"/>
+          <p:cNvSpPr>
+            <a:spLocks noGrp="1"/>
+          </p:cNvSpPr>
+          <p:nvPr>
+            <p:ph type="sldNum" sz="quarter" idx="4294967295"/>
+          </p:nvPr>
+        </p:nvSpPr>
+        <p:spPr>
+          <a:xfrm>
+            <a:off x="27432" y="91440"/>
+            <a:ext cx="585216" cy="475488"/>
+          </a:xfrm>
+          <a:prstGeom prst="rect">
+            <a:avLst/>
+          </a:prstGeom>
+          <a:extLst>
+            <a:ext uri="{C572A759-6A51-4108-AA02-DFA0A04FC94B}">
+              <ma14:wrappingTextBoxFlag xmlns:ma14="http://schemas.microsoft.com/office/mac/drawingml/2011/main" val="0"/>
+            </a:ext>
+          </a:extLst>
+        </p:spPr>
+        <p:txBody>
+          <a:bodyPr/>
+          <a:lstStyle>
+            <a:lvl1pPr>
+              <a:defRPr sz="2000">
+                <a:solidFill>
+                  <a:srgbClr val="FFFFFF"/>
+                </a:solidFill>
+                <a:latin typeface="Calibri"/>
+                <a:ea typeface="Calibri"/>
+                <a:cs typeface="Calibri"/>
+              </a:defRPr>
+            </a:lvl1pPr>
+          </a:lstStyle>
+          <a:p>
+            <a:pPr algn="ctr"/>
+            <a:fld id="{F7021451-1387-4CA6-816F-3879F97B5CBC}" type="slidenum">
+              <a:rPr b="1" lang="en-US"/>
+              <a:t>52</a:t>
             </a:fld>
             <a:endParaRPr lang="en-US"/>
           </a:p>
